--- a/presentation/slides_v2.pptx
+++ b/presentation/slides_v2.pptx
@@ -10772,7 +10772,7 @@
                 <a:ea typeface="Calibri" pitchFamily="34" charset="-122"/>
                 <a:cs typeface="Calibri" pitchFamily="34" charset="-120"/>
               </a:rPr>
-              <a:t>The data and two real defects in it, eleven models, and one leakage-tested harness.</a:t>
+              <a:t>The data and two real defects in it, twelve models, and one leakage-tested harness.</a:t>
             </a:r>
             <a:endParaRPr lang="en-US" sz="1500" dirty="0"/>
           </a:p>
@@ -14608,7 +14608,7 @@
                 <a:ea typeface="Calibri" pitchFamily="34" charset="-122"/>
                 <a:cs typeface="Calibri" pitchFamily="34" charset="-120"/>
               </a:rPr>
-              <a:t>The two recurrent networks</a:t>
+              <a:t>The three deep learning models</a:t>
             </a:r>
             <a:endParaRPr lang="en-US" sz="2900" dirty="0"/>
           </a:p>
@@ -14830,7 +14830,7 @@
                 <a:ea typeface="Calibri" pitchFamily="34" charset="-122"/>
                 <a:cs typeface="Calibri" pitchFamily="34" charset="-120"/>
               </a:rPr>
-              <a:t>BOTH NETWORKS, FITTED IDENTICALLY</a:t>
+              <a:t>THREE ARCHITECTURES, ONE PROTOCOL</a:t>
             </a:r>
             <a:endParaRPr lang="en-US" sz="900" dirty="0"/>
           </a:p>
@@ -14844,8 +14844,8 @@
         </p:nvSpPr>
         <p:spPr>
           <a:xfrm>
-            <a:off x="6578600" y="2260600"/>
-            <a:ext cx="4699000" cy="2260600"/>
+            <a:off x="6578600" y="2235200"/>
+            <a:ext cx="4699000" cy="215900"/>
           </a:xfrm>
           <a:prstGeom prst="rect">
             <a:avLst/>
@@ -14854,125 +14854,288 @@
           <a:ln/>
         </p:spPr>
         <p:txBody>
-          <a:bodyPr wrap="square" rtlCol="0" anchor="t"/>
-          <a:lstStyle/>
-          <a:p>
-            <a:pPr marL="203200" indent="-203200">
-              <a:lnSpc>
-                <a:spcPct val="150000"/>
-              </a:lnSpc>
-              <a:spcAft>
-                <a:spcPts val="1200"/>
-              </a:spcAft>
-              <a:buSzPct val="100000"/>
-              <a:buChar char="●"/>
+          <a:bodyPr wrap="square" lIns="0" tIns="0" rIns="0" bIns="0" rtlCol="0" anchor="ctr"/>
+          <a:lstStyle/>
+          <a:p>
+            <a:pPr indent="0" marL="0">
+              <a:buNone/>
             </a:pPr>
             <a:r>
-              <a:rPr lang="en-US" sz="1050" dirty="0">
-                <a:solidFill>
-                  <a:srgbClr val="1C2B2C"/>
+              <a:rPr lang="en-US" sz="1300" b="1" dirty="0">
+                <a:solidFill>
+                  <a:srgbClr val="16343A"/>
                 </a:solidFill>
                 <a:latin typeface="Calibri" pitchFamily="34" charset="0"/>
                 <a:ea typeface="Calibri" pitchFamily="34" charset="-122"/>
                 <a:cs typeface="Calibri" pitchFamily="34" charset="-120"/>
               </a:rPr>
-              <a:t>H = 24 hidden units, a 30-day window</a:t>
-            </a:r>
-            <a:endParaRPr lang="en-US" sz="1050" dirty="0"/>
-          </a:p>
-          <a:p>
-            <a:pPr marL="203200" indent="-203200">
+              <a:t>GRU</a:t>
+            </a:r>
+            <a:endParaRPr lang="en-US" sz="1300" dirty="0"/>
+          </a:p>
+        </p:txBody>
+      </p:sp>
+      <p:sp>
+        <p:nvSpPr>
+          <p:cNvPr id="12" name="Text 9"/>
+          <p:cNvSpPr/>
+          <p:nvPr/>
+        </p:nvSpPr>
+        <p:spPr>
+          <a:xfrm>
+            <a:off x="6578600" y="2451100"/>
+            <a:ext cx="4699000" cy="368300"/>
+          </a:xfrm>
+          <a:prstGeom prst="rect">
+            <a:avLst/>
+          </a:prstGeom>
+          <a:noFill/>
+          <a:ln/>
+        </p:spPr>
+        <p:txBody>
+          <a:bodyPr wrap="square" lIns="0" tIns="0" rIns="0" bIns="0" rtlCol="0" anchor="t"/>
+          <a:lstStyle/>
+          <a:p>
+            <a:pPr indent="0" marL="0">
               <a:lnSpc>
-                <a:spcPct val="150000"/>
+                <a:spcPct val="125000"/>
               </a:lnSpc>
-              <a:spcAft>
-                <a:spcPts val="1200"/>
-              </a:spcAft>
-              <a:buSzPct val="100000"/>
-              <a:buChar char="●"/>
+              <a:buNone/>
             </a:pPr>
             <a:r>
-              <a:rPr lang="en-US" sz="1050" dirty="0">
-                <a:solidFill>
-                  <a:srgbClr val="1C2B2C"/>
+              <a:rPr lang="en-US" sz="1000" dirty="0">
+                <a:solidFill>
+                  <a:srgbClr val="5C7678"/>
                 </a:solidFill>
                 <a:latin typeface="Calibri" pitchFamily="34" charset="0"/>
                 <a:ea typeface="Calibri" pitchFamily="34" charset="-122"/>
                 <a:cs typeface="Calibri" pitchFamily="34" charset="-120"/>
               </a:rPr>
-              <a:t>6 input channels (10 with weather): log-concentration, a missingness flag, two annual Fourier pairs — K=2, against ARIMA's K=4</a:t>
-            </a:r>
-            <a:endParaRPr lang="en-US" sz="1050" dirty="0"/>
-          </a:p>
-          <a:p>
-            <a:pPr marL="203200" indent="-203200">
-              <a:lnSpc>
-                <a:spcPct val="150000"/>
-              </a:lnSpc>
-              <a:spcAft>
-                <a:spcPts val="1200"/>
-              </a:spcAft>
-              <a:buSzPct val="100000"/>
-              <a:buChar char="●"/>
+              <a:t>2 gates, no separate memory cell — 2,329 parameters</a:t>
+            </a:r>
+            <a:endParaRPr lang="en-US" sz="1000" dirty="0"/>
+          </a:p>
+        </p:txBody>
+      </p:sp>
+      <p:sp>
+        <p:nvSpPr>
+          <p:cNvPr id="13" name="Text 10"/>
+          <p:cNvSpPr/>
+          <p:nvPr/>
+        </p:nvSpPr>
+        <p:spPr>
+          <a:xfrm>
+            <a:off x="6578600" y="2819400"/>
+            <a:ext cx="4699000" cy="215900"/>
+          </a:xfrm>
+          <a:prstGeom prst="rect">
+            <a:avLst/>
+          </a:prstGeom>
+          <a:noFill/>
+          <a:ln/>
+        </p:spPr>
+        <p:txBody>
+          <a:bodyPr wrap="square" lIns="0" tIns="0" rIns="0" bIns="0" rtlCol="0" anchor="ctr"/>
+          <a:lstStyle/>
+          <a:p>
+            <a:pPr indent="0" marL="0">
+              <a:buNone/>
             </a:pPr>
             <a:r>
-              <a:rPr lang="en-US" sz="1050" dirty="0">
-                <a:solidFill>
-                  <a:srgbClr val="1C2B2C"/>
+              <a:rPr lang="en-US" sz="1300" b="1" dirty="0">
+                <a:solidFill>
+                  <a:srgbClr val="16343A"/>
                 </a:solidFill>
                 <a:latin typeface="Calibri" pitchFamily="34" charset="0"/>
                 <a:ea typeface="Calibri" pitchFamily="34" charset="-122"/>
                 <a:cs typeface="Calibri" pitchFamily="34" charset="-120"/>
               </a:rPr>
-              <a:t>Gaps forward-filled, the flag marking which days were filled</a:t>
-            </a:r>
-            <a:endParaRPr lang="en-US" sz="1050" dirty="0"/>
-          </a:p>
-          <a:p>
-            <a:pPr marL="203200" indent="-203200">
+              <a:t>LSTM</a:t>
+            </a:r>
+            <a:endParaRPr lang="en-US" sz="1300" dirty="0"/>
+          </a:p>
+        </p:txBody>
+      </p:sp>
+      <p:sp>
+        <p:nvSpPr>
+          <p:cNvPr id="14" name="Text 11"/>
+          <p:cNvSpPr/>
+          <p:nvPr/>
+        </p:nvSpPr>
+        <p:spPr>
+          <a:xfrm>
+            <a:off x="6578600" y="3035300"/>
+            <a:ext cx="4699000" cy="368300"/>
+          </a:xfrm>
+          <a:prstGeom prst="rect">
+            <a:avLst/>
+          </a:prstGeom>
+          <a:noFill/>
+          <a:ln/>
+        </p:spPr>
+        <p:txBody>
+          <a:bodyPr wrap="square" lIns="0" tIns="0" rIns="0" bIns="0" rtlCol="0" anchor="t"/>
+          <a:lstStyle/>
+          <a:p>
+            <a:pPr indent="0" marL="0">
               <a:lnSpc>
-                <a:spcPct val="150000"/>
+                <a:spcPct val="125000"/>
               </a:lnSpc>
-              <a:spcAft>
-                <a:spcPts val="1200"/>
-              </a:spcAft>
-              <a:buSzPct val="100000"/>
-              <a:buChar char="●"/>
+              <a:buNone/>
             </a:pPr>
             <a:r>
-              <a:rPr lang="en-US" sz="1050" dirty="0">
-                <a:solidFill>
-                  <a:srgbClr val="1C2B2C"/>
+              <a:rPr lang="en-US" sz="1000" dirty="0">
+                <a:solidFill>
+                  <a:srgbClr val="5C7678"/>
                 </a:solidFill>
                 <a:latin typeface="Calibri" pitchFamily="34" charset="0"/>
                 <a:ea typeface="Calibri" pitchFamily="34" charset="-122"/>
                 <a:cs typeface="Calibri" pitchFamily="34" charset="-120"/>
               </a:rPr>
-              <a:t>Adam on mean absolute error, early stopping on a chronological holdout</a:t>
-            </a:r>
-            <a:endParaRPr lang="en-US" sz="1050" dirty="0"/>
-          </a:p>
-          <a:p>
-            <a:pPr marL="203200" indent="-203200">
-              <a:lnSpc>
-                <a:spcPct val="150000"/>
-              </a:lnSpc>
-              <a:spcAft>
-                <a:spcPts val="1200"/>
-              </a:spcAft>
-              <a:buSzPct val="100000"/>
-              <a:buChar char="●"/>
+              <a:t>3 gates and an explicit cell state — 3,097 parameters</a:t>
+            </a:r>
+            <a:endParaRPr lang="en-US" sz="1000" dirty="0"/>
+          </a:p>
+        </p:txBody>
+      </p:sp>
+      <p:sp>
+        <p:nvSpPr>
+          <p:cNvPr id="15" name="Text 12"/>
+          <p:cNvSpPr/>
+          <p:nvPr/>
+        </p:nvSpPr>
+        <p:spPr>
+          <a:xfrm>
+            <a:off x="6578600" y="3403600"/>
+            <a:ext cx="4699000" cy="215900"/>
+          </a:xfrm>
+          <a:prstGeom prst="rect">
+            <a:avLst/>
+          </a:prstGeom>
+          <a:noFill/>
+          <a:ln/>
+        </p:spPr>
+        <p:txBody>
+          <a:bodyPr wrap="square" lIns="0" tIns="0" rIns="0" bIns="0" rtlCol="0" anchor="ctr"/>
+          <a:lstStyle/>
+          <a:p>
+            <a:pPr indent="0" marL="0">
+              <a:buNone/>
             </a:pPr>
             <a:r>
-              <a:rPr lang="en-US" sz="1050" dirty="0">
-                <a:solidFill>
-                  <a:srgbClr val="1C2B2C"/>
+              <a:rPr lang="en-US" sz="1300" b="1" dirty="0">
+                <a:solidFill>
+                  <a:srgbClr val="E35D45"/>
                 </a:solidFill>
                 <a:latin typeface="Calibri" pitchFamily="34" charset="0"/>
                 <a:ea typeface="Calibri" pitchFamily="34" charset="-122"/>
                 <a:cs typeface="Calibri" pitchFamily="34" charset="-120"/>
               </a:rPr>
-              <a:t>The LSTM swaps the recurrent cell only: 3 gates and a cell state, 3,097 parameters against the GRU's 2,329</a:t>
+              <a:t>Transformer</a:t>
+            </a:r>
+            <a:endParaRPr lang="en-US" sz="1300" dirty="0"/>
+          </a:p>
+        </p:txBody>
+      </p:sp>
+      <p:sp>
+        <p:nvSpPr>
+          <p:cNvPr id="16" name="Text 13"/>
+          <p:cNvSpPr/>
+          <p:nvPr/>
+        </p:nvSpPr>
+        <p:spPr>
+          <a:xfrm>
+            <a:off x="6578600" y="3619500"/>
+            <a:ext cx="4699000" cy="368300"/>
+          </a:xfrm>
+          <a:prstGeom prst="rect">
+            <a:avLst/>
+          </a:prstGeom>
+          <a:noFill/>
+          <a:ln/>
+        </p:spPr>
+        <p:txBody>
+          <a:bodyPr wrap="square" lIns="0" tIns="0" rIns="0" bIns="0" rtlCol="0" anchor="t"/>
+          <a:lstStyle/>
+          <a:p>
+            <a:pPr indent="0" marL="0">
+              <a:lnSpc>
+                <a:spcPct val="125000"/>
+              </a:lnSpc>
+              <a:buNone/>
+            </a:pPr>
+            <a:r>
+              <a:rPr lang="en-US" sz="1000" dirty="0">
+                <a:solidFill>
+                  <a:srgbClr val="5C7678"/>
+                </a:solidFill>
+                <a:latin typeface="Calibri" pitchFamily="34" charset="0"/>
+                <a:ea typeface="Calibri" pitchFamily="34" charset="-122"/>
+                <a:cs typeface="Calibri" pitchFamily="34" charset="-120"/>
+              </a:rPr>
+              <a:t>Self-attention in place of recurrence: d_model = 16, 2 heads, 1 encoder layer — 3,409, the largest of the three</a:t>
+            </a:r>
+            <a:endParaRPr lang="en-US" sz="1000" dirty="0"/>
+          </a:p>
+        </p:txBody>
+      </p:sp>
+      <p:sp>
+        <p:nvSpPr>
+          <p:cNvPr id="17" name="Shape 14"/>
+          <p:cNvSpPr/>
+          <p:nvPr/>
+        </p:nvSpPr>
+        <p:spPr>
+          <a:xfrm>
+            <a:off x="6578600" y="4038600"/>
+            <a:ext cx="4622800" cy="12700"/>
+          </a:xfrm>
+          <a:prstGeom prst="rect">
+            <a:avLst/>
+          </a:prstGeom>
+          <a:solidFill>
+            <a:srgbClr val="E6EBEB"/>
+          </a:solidFill>
+          <a:ln/>
+        </p:spPr>
+      </p:sp>
+      <p:sp>
+        <p:nvSpPr>
+          <p:cNvPr id="18" name="Text 15"/>
+          <p:cNvSpPr/>
+          <p:nvPr/>
+        </p:nvSpPr>
+        <p:spPr>
+          <a:xfrm>
+            <a:off x="6578600" y="4140200"/>
+            <a:ext cx="4699000" cy="406400"/>
+          </a:xfrm>
+          <a:prstGeom prst="rect">
+            <a:avLst/>
+          </a:prstGeom>
+          <a:noFill/>
+          <a:ln/>
+        </p:spPr>
+        <p:txBody>
+          <a:bodyPr wrap="square" lIns="0" tIns="0" rIns="0" bIns="0" rtlCol="0" anchor="t"/>
+          <a:lstStyle/>
+          <a:p>
+            <a:pPr indent="0" marL="0">
+              <a:lnSpc>
+                <a:spcPct val="130000"/>
+              </a:lnSpc>
+              <a:buNone/>
+            </a:pPr>
+            <a:r>
+              <a:rPr lang="en-US" sz="1050" dirty="0">
+                <a:solidFill>
+                  <a:srgbClr val="5C7678"/>
+                </a:solidFill>
+                <a:latin typeface="Calibri" pitchFamily="34" charset="0"/>
+                <a:ea typeface="Calibri" pitchFamily="34" charset="-122"/>
+                <a:cs typeface="Calibri" pitchFamily="34" charset="-120"/>
+              </a:rPr>
+              <a:t>Same 6 channels, same 30-day window, same target, same optimiser, same ten seeds. Only the architecture differs.</a:t>
             </a:r>
             <a:endParaRPr lang="en-US" sz="1050" dirty="0"/>
           </a:p>
@@ -14980,7 +15143,7 @@
       </p:sp>
       <p:sp>
         <p:nvSpPr>
-          <p:cNvPr id="12" name="Shape 9"/>
+          <p:cNvPr id="19" name="Shape 16"/>
           <p:cNvSpPr/>
           <p:nvPr/>
         </p:nvSpPr>
@@ -15002,7 +15165,7 @@
       </p:sp>
       <p:sp>
         <p:nvSpPr>
-          <p:cNvPr id="13" name="Text 10"/>
+          <p:cNvPr id="20" name="Text 17"/>
           <p:cNvSpPr/>
           <p:nvPr/>
         </p:nvSpPr>
@@ -15041,7 +15204,7 @@
       </p:sp>
       <p:sp>
         <p:nvSpPr>
-          <p:cNvPr id="14" name="Text 11"/>
+          <p:cNvPr id="21" name="Text 18"/>
           <p:cNvSpPr/>
           <p:nvPr/>
         </p:nvSpPr>
@@ -15080,7 +15243,7 @@
       </p:sp>
       <p:sp>
         <p:nvSpPr>
-          <p:cNvPr id="15" name="Text 12"/>
+          <p:cNvPr id="22" name="Text 19"/>
           <p:cNvSpPr/>
           <p:nvPr/>
         </p:nvSpPr>
@@ -15114,7 +15277,7 @@
                 <a:ea typeface="Calibri" pitchFamily="34" charset="-122"/>
                 <a:cs typeface="Calibri" pitchFamily="34" charset="-120"/>
               </a:rPr>
-              <a:t>The two models whose results depend on a random initialisation. Every number for them is reported as a range across ten runs, never a single favourable one — and the GRU's training is not even bit-reproducible at a fixed seed.</a:t>
+              <a:t>The three models whose results depend on a random initialisation. Every number for them is reported as a range across ten runs, never a single favourable one — and the GRU's training is not even bit-reproducible at a fixed seed.</a:t>
             </a:r>
             <a:endParaRPr lang="en-US" sz="1250" dirty="0"/>
           </a:p>
@@ -17701,11 +17864,11 @@
         <p:spPr>
           <a:xfrm>
             <a:off x="698500" y="1727200"/>
-            <a:ext cx="10795000" cy="2565400"/>
+            <a:ext cx="10795000" cy="2590800"/>
           </a:xfrm>
           <a:prstGeom prst="roundRect">
             <a:avLst>
-              <a:gd name="adj" fmla="val 4990"/>
+              <a:gd name="adj" fmla="val 4941"/>
             </a:avLst>
           </a:prstGeom>
           <a:solidFill>
@@ -17768,8 +17931,8 @@
         </p:nvSpPr>
         <p:spPr>
           <a:xfrm>
-            <a:off x="3740150" y="2044700"/>
-            <a:ext cx="12700" cy="1765300"/>
+            <a:off x="3740150" y="2019300"/>
+            <a:ext cx="12700" cy="1866900"/>
           </a:xfrm>
           <a:prstGeom prst="rect">
             <a:avLst/>
@@ -17788,8 +17951,8 @@
         </p:nvSpPr>
         <p:spPr>
           <a:xfrm>
-            <a:off x="5537200" y="2044700"/>
-            <a:ext cx="12700" cy="1765300"/>
+            <a:off x="5537200" y="2019300"/>
+            <a:ext cx="12700" cy="1866900"/>
           </a:xfrm>
           <a:prstGeom prst="rect">
             <a:avLst/>
@@ -17808,8 +17971,8 @@
         </p:nvSpPr>
         <p:spPr>
           <a:xfrm>
-            <a:off x="7334250" y="2044700"/>
-            <a:ext cx="12700" cy="1765300"/>
+            <a:off x="7334250" y="2019300"/>
+            <a:ext cx="12700" cy="1866900"/>
           </a:xfrm>
           <a:prstGeom prst="rect">
             <a:avLst/>
@@ -17828,8 +17991,8 @@
         </p:nvSpPr>
         <p:spPr>
           <a:xfrm>
-            <a:off x="10922000" y="2044700"/>
-            <a:ext cx="12700" cy="1765300"/>
+            <a:off x="10922000" y="2019300"/>
+            <a:ext cx="12700" cy="1866900"/>
           </a:xfrm>
           <a:prstGeom prst="rect">
             <a:avLst/>
@@ -17848,8 +18011,8 @@
         </p:nvSpPr>
         <p:spPr>
           <a:xfrm>
-            <a:off x="9124950" y="2006600"/>
-            <a:ext cx="12700" cy="1841500"/>
+            <a:off x="9124950" y="1981200"/>
+            <a:ext cx="12700" cy="1930400"/>
           </a:xfrm>
           <a:prstGeom prst="rect">
             <a:avLst/>
@@ -17868,7 +18031,68 @@
         </p:nvSpPr>
         <p:spPr>
           <a:xfrm>
-            <a:off x="952500" y="2095500"/>
+            <a:off x="952500" y="2070100"/>
+            <a:ext cx="1587500" cy="165100"/>
+          </a:xfrm>
+          <a:prstGeom prst="rect">
+            <a:avLst/>
+          </a:prstGeom>
+          <a:noFill/>
+          <a:ln/>
+        </p:spPr>
+        <p:txBody>
+          <a:bodyPr wrap="square" lIns="0" tIns="0" rIns="0" bIns="0" rtlCol="0" anchor="ctr"/>
+          <a:lstStyle/>
+          <a:p>
+            <a:pPr algn="r" indent="0" marL="0">
+              <a:buNone/>
+            </a:pPr>
+            <a:r>
+              <a:rPr lang="en-US" sz="950" b="1" dirty="0">
+                <a:solidFill>
+                  <a:srgbClr val="16343A"/>
+                </a:solidFill>
+                <a:latin typeface="Calibri" pitchFamily="34" charset="0"/>
+                <a:ea typeface="Calibri" pitchFamily="34" charset="-122"/>
+                <a:cs typeface="Calibri" pitchFamily="34" charset="-120"/>
+              </a:rPr>
+              <a:t>Transformer, 10 seeds</a:t>
+            </a:r>
+            <a:endParaRPr lang="en-US" sz="950" dirty="0"/>
+          </a:p>
+        </p:txBody>
+      </p:sp>
+      <p:sp>
+        <p:nvSpPr>
+          <p:cNvPr id="13" name="Shape 11"/>
+          <p:cNvSpPr/>
+          <p:nvPr/>
+        </p:nvSpPr>
+        <p:spPr>
+          <a:xfrm>
+            <a:off x="6038850" y="2108200"/>
+            <a:ext cx="393700" cy="88900"/>
+          </a:xfrm>
+          <a:prstGeom prst="roundRect">
+            <a:avLst>
+              <a:gd name="adj" fmla="val 51429"/>
+            </a:avLst>
+          </a:prstGeom>
+          <a:solidFill>
+            <a:srgbClr val="E35D45"/>
+          </a:solidFill>
+          <a:ln/>
+        </p:spPr>
+      </p:sp>
+      <p:sp>
+        <p:nvSpPr>
+          <p:cNvPr id="14" name="Text 12"/>
+          <p:cNvSpPr/>
+          <p:nvPr/>
+        </p:nvSpPr>
+        <p:spPr>
+          <a:xfrm>
+            <a:off x="952500" y="2266950"/>
             <a:ext cx="1587500" cy="165100"/>
           </a:xfrm>
           <a:prstGeom prst="rect">
@@ -17901,13 +18125,13 @@
       </p:sp>
       <p:sp>
         <p:nvSpPr>
-          <p:cNvPr id="13" name="Shape 11"/>
-          <p:cNvSpPr/>
-          <p:nvPr/>
-        </p:nvSpPr>
-        <p:spPr>
-          <a:xfrm>
-            <a:off x="6007100" y="2133600"/>
+          <p:cNvPr id="15" name="Shape 13"/>
+          <p:cNvSpPr/>
+          <p:nvPr/>
+        </p:nvSpPr>
+        <p:spPr>
+          <a:xfrm>
+            <a:off x="6007100" y="2305050"/>
             <a:ext cx="679450" cy="88900"/>
           </a:xfrm>
           <a:prstGeom prst="roundRect">
@@ -17923,13 +18147,13 @@
       </p:sp>
       <p:sp>
         <p:nvSpPr>
-          <p:cNvPr id="14" name="Text 12"/>
-          <p:cNvSpPr/>
-          <p:nvPr/>
-        </p:nvSpPr>
-        <p:spPr>
-          <a:xfrm>
-            <a:off x="952500" y="2305050"/>
+          <p:cNvPr id="16" name="Text 14"/>
+          <p:cNvSpPr/>
+          <p:nvPr/>
+        </p:nvSpPr>
+        <p:spPr>
+          <a:xfrm>
+            <a:off x="952500" y="2463800"/>
             <a:ext cx="1587500" cy="165100"/>
           </a:xfrm>
           <a:prstGeom prst="rect">
@@ -17962,13 +18186,13 @@
       </p:sp>
       <p:sp>
         <p:nvSpPr>
-          <p:cNvPr id="15" name="Shape 13"/>
-          <p:cNvSpPr/>
-          <p:nvPr/>
-        </p:nvSpPr>
-        <p:spPr>
-          <a:xfrm>
-            <a:off x="5899150" y="2343150"/>
+          <p:cNvPr id="17" name="Shape 15"/>
+          <p:cNvSpPr/>
+          <p:nvPr/>
+        </p:nvSpPr>
+        <p:spPr>
+          <a:xfrm>
+            <a:off x="5899150" y="2501900"/>
             <a:ext cx="1041400" cy="88900"/>
           </a:xfrm>
           <a:prstGeom prst="roundRect">
@@ -17984,13 +18208,13 @@
       </p:sp>
       <p:sp>
         <p:nvSpPr>
-          <p:cNvPr id="16" name="Text 14"/>
-          <p:cNvSpPr/>
-          <p:nvPr/>
-        </p:nvSpPr>
-        <p:spPr>
-          <a:xfrm>
-            <a:off x="952500" y="2514600"/>
+          <p:cNvPr id="18" name="Text 16"/>
+          <p:cNvSpPr/>
+          <p:nvPr/>
+        </p:nvSpPr>
+        <p:spPr>
+          <a:xfrm>
+            <a:off x="952500" y="2660650"/>
             <a:ext cx="1587500" cy="165100"/>
           </a:xfrm>
           <a:prstGeom prst="rect">
@@ -18023,13 +18247,13 @@
       </p:sp>
       <p:sp>
         <p:nvSpPr>
-          <p:cNvPr id="17" name="Shape 15"/>
-          <p:cNvSpPr/>
-          <p:nvPr/>
-        </p:nvSpPr>
-        <p:spPr>
-          <a:xfrm>
-            <a:off x="6921500" y="2546350"/>
+          <p:cNvPr id="19" name="Shape 17"/>
+          <p:cNvSpPr/>
+          <p:nvPr/>
+        </p:nvSpPr>
+        <p:spPr>
+          <a:xfrm>
+            <a:off x="6921500" y="2692400"/>
             <a:ext cx="101600" cy="101600"/>
           </a:xfrm>
           <a:prstGeom prst="ellipse">
@@ -18043,13 +18267,13 @@
       </p:sp>
       <p:sp>
         <p:nvSpPr>
-          <p:cNvPr id="18" name="Text 16"/>
-          <p:cNvSpPr/>
-          <p:nvPr/>
-        </p:nvSpPr>
-        <p:spPr>
-          <a:xfrm>
-            <a:off x="952500" y="2724150"/>
+          <p:cNvPr id="20" name="Text 18"/>
+          <p:cNvSpPr/>
+          <p:nvPr/>
+        </p:nvSpPr>
+        <p:spPr>
+          <a:xfrm>
+            <a:off x="952500" y="2857500"/>
             <a:ext cx="1587500" cy="165100"/>
           </a:xfrm>
           <a:prstGeom prst="rect">
@@ -18082,13 +18306,13 @@
       </p:sp>
       <p:sp>
         <p:nvSpPr>
-          <p:cNvPr id="19" name="Shape 17"/>
-          <p:cNvSpPr/>
-          <p:nvPr/>
-        </p:nvSpPr>
-        <p:spPr>
-          <a:xfrm>
-            <a:off x="7931150" y="2755900"/>
+          <p:cNvPr id="21" name="Shape 19"/>
+          <p:cNvSpPr/>
+          <p:nvPr/>
+        </p:nvSpPr>
+        <p:spPr>
+          <a:xfrm>
+            <a:off x="7931150" y="2889250"/>
             <a:ext cx="101600" cy="101600"/>
           </a:xfrm>
           <a:prstGeom prst="ellipse">
@@ -18102,13 +18326,13 @@
       </p:sp>
       <p:sp>
         <p:nvSpPr>
-          <p:cNvPr id="20" name="Text 18"/>
-          <p:cNvSpPr/>
-          <p:nvPr/>
-        </p:nvSpPr>
-        <p:spPr>
-          <a:xfrm>
-            <a:off x="952500" y="2933700"/>
+          <p:cNvPr id="22" name="Text 20"/>
+          <p:cNvSpPr/>
+          <p:nvPr/>
+        </p:nvSpPr>
+        <p:spPr>
+          <a:xfrm>
+            <a:off x="952500" y="3054350"/>
             <a:ext cx="1587500" cy="165100"/>
           </a:xfrm>
           <a:prstGeom prst="rect">
@@ -18141,13 +18365,13 @@
       </p:sp>
       <p:sp>
         <p:nvSpPr>
-          <p:cNvPr id="21" name="Shape 19"/>
-          <p:cNvSpPr/>
-          <p:nvPr/>
-        </p:nvSpPr>
-        <p:spPr>
-          <a:xfrm>
-            <a:off x="8464550" y="2965450"/>
+          <p:cNvPr id="23" name="Shape 21"/>
+          <p:cNvSpPr/>
+          <p:nvPr/>
+        </p:nvSpPr>
+        <p:spPr>
+          <a:xfrm>
+            <a:off x="8464550" y="3086100"/>
             <a:ext cx="101600" cy="101600"/>
           </a:xfrm>
           <a:prstGeom prst="ellipse">
@@ -18161,13 +18385,13 @@
       </p:sp>
       <p:sp>
         <p:nvSpPr>
-          <p:cNvPr id="22" name="Text 20"/>
-          <p:cNvSpPr/>
-          <p:nvPr/>
-        </p:nvSpPr>
-        <p:spPr>
-          <a:xfrm>
-            <a:off x="952500" y="3143250"/>
+          <p:cNvPr id="24" name="Text 22"/>
+          <p:cNvSpPr/>
+          <p:nvPr/>
+        </p:nvSpPr>
+        <p:spPr>
+          <a:xfrm>
+            <a:off x="952500" y="3251200"/>
             <a:ext cx="1587500" cy="165100"/>
           </a:xfrm>
           <a:prstGeom prst="rect">
@@ -18200,13 +18424,13 @@
       </p:sp>
       <p:sp>
         <p:nvSpPr>
-          <p:cNvPr id="23" name="Shape 21"/>
-          <p:cNvSpPr/>
-          <p:nvPr/>
-        </p:nvSpPr>
-        <p:spPr>
-          <a:xfrm>
-            <a:off x="8648700" y="3175000"/>
+          <p:cNvPr id="25" name="Shape 23"/>
+          <p:cNvSpPr/>
+          <p:nvPr/>
+        </p:nvSpPr>
+        <p:spPr>
+          <a:xfrm>
+            <a:off x="8648700" y="3282950"/>
             <a:ext cx="101600" cy="101600"/>
           </a:xfrm>
           <a:prstGeom prst="ellipse">
@@ -18220,13 +18444,13 @@
       </p:sp>
       <p:sp>
         <p:nvSpPr>
-          <p:cNvPr id="24" name="Text 22"/>
-          <p:cNvSpPr/>
-          <p:nvPr/>
-        </p:nvSpPr>
-        <p:spPr>
-          <a:xfrm>
-            <a:off x="952500" y="3352800"/>
+          <p:cNvPr id="26" name="Text 24"/>
+          <p:cNvSpPr/>
+          <p:nvPr/>
+        </p:nvSpPr>
+        <p:spPr>
+          <a:xfrm>
+            <a:off x="952500" y="3448050"/>
             <a:ext cx="1587500" cy="165100"/>
           </a:xfrm>
           <a:prstGeom prst="rect">
@@ -18259,13 +18483,13 @@
       </p:sp>
       <p:sp>
         <p:nvSpPr>
-          <p:cNvPr id="25" name="Shape 23"/>
-          <p:cNvSpPr/>
-          <p:nvPr/>
-        </p:nvSpPr>
-        <p:spPr>
-          <a:xfrm>
-            <a:off x="8966200" y="3384550"/>
+          <p:cNvPr id="27" name="Shape 25"/>
+          <p:cNvSpPr/>
+          <p:nvPr/>
+        </p:nvSpPr>
+        <p:spPr>
+          <a:xfrm>
+            <a:off x="8966200" y="3479800"/>
             <a:ext cx="101600" cy="101600"/>
           </a:xfrm>
           <a:prstGeom prst="ellipse">
@@ -18279,13 +18503,13 @@
       </p:sp>
       <p:sp>
         <p:nvSpPr>
-          <p:cNvPr id="26" name="Text 24"/>
-          <p:cNvSpPr/>
-          <p:nvPr/>
-        </p:nvSpPr>
-        <p:spPr>
-          <a:xfrm>
-            <a:off x="952500" y="3562350"/>
+          <p:cNvPr id="28" name="Text 26"/>
+          <p:cNvSpPr/>
+          <p:nvPr/>
+        </p:nvSpPr>
+        <p:spPr>
+          <a:xfrm>
+            <a:off x="952500" y="3644900"/>
             <a:ext cx="1587500" cy="165100"/>
           </a:xfrm>
           <a:prstGeom prst="rect">
@@ -18318,13 +18542,13 @@
       </p:sp>
       <p:sp>
         <p:nvSpPr>
-          <p:cNvPr id="27" name="Shape 25"/>
-          <p:cNvSpPr/>
-          <p:nvPr/>
-        </p:nvSpPr>
-        <p:spPr>
-          <a:xfrm>
-            <a:off x="9074150" y="3594100"/>
+          <p:cNvPr id="29" name="Shape 27"/>
+          <p:cNvSpPr/>
+          <p:nvPr/>
+        </p:nvSpPr>
+        <p:spPr>
+          <a:xfrm>
+            <a:off x="9074150" y="3676650"/>
             <a:ext cx="101600" cy="101600"/>
           </a:xfrm>
           <a:prstGeom prst="ellipse">
@@ -18338,13 +18562,13 @@
       </p:sp>
       <p:sp>
         <p:nvSpPr>
-          <p:cNvPr id="28" name="Text 26"/>
-          <p:cNvSpPr/>
-          <p:nvPr/>
-        </p:nvSpPr>
-        <p:spPr>
-          <a:xfrm>
-            <a:off x="952500" y="3771900"/>
+          <p:cNvPr id="30" name="Text 28"/>
+          <p:cNvSpPr/>
+          <p:nvPr/>
+        </p:nvSpPr>
+        <p:spPr>
+          <a:xfrm>
+            <a:off x="952500" y="3841750"/>
             <a:ext cx="1587500" cy="165100"/>
           </a:xfrm>
           <a:prstGeom prst="rect">
@@ -18377,13 +18601,13 @@
       </p:sp>
       <p:sp>
         <p:nvSpPr>
-          <p:cNvPr id="29" name="Shape 27"/>
-          <p:cNvSpPr/>
-          <p:nvPr/>
-        </p:nvSpPr>
-        <p:spPr>
-          <a:xfrm>
-            <a:off x="9366250" y="3803650"/>
+          <p:cNvPr id="31" name="Shape 29"/>
+          <p:cNvSpPr/>
+          <p:nvPr/>
+        </p:nvSpPr>
+        <p:spPr>
+          <a:xfrm>
+            <a:off x="9366250" y="3873500"/>
             <a:ext cx="101600" cy="101600"/>
           </a:xfrm>
           <a:prstGeom prst="ellipse">
@@ -18397,13 +18621,13 @@
       </p:sp>
       <p:sp>
         <p:nvSpPr>
-          <p:cNvPr id="30" name="Text 28"/>
-          <p:cNvSpPr/>
-          <p:nvPr/>
-        </p:nvSpPr>
-        <p:spPr>
-          <a:xfrm>
-            <a:off x="3359150" y="3937000"/>
+          <p:cNvPr id="32" name="Text 30"/>
+          <p:cNvSpPr/>
+          <p:nvPr/>
+        </p:nvSpPr>
+        <p:spPr>
+          <a:xfrm>
+            <a:off x="3359150" y="4000500"/>
             <a:ext cx="762000" cy="177800"/>
           </a:xfrm>
           <a:prstGeom prst="rect">
@@ -18436,13 +18660,13 @@
       </p:sp>
       <p:sp>
         <p:nvSpPr>
-          <p:cNvPr id="31" name="Text 29"/>
-          <p:cNvSpPr/>
-          <p:nvPr/>
-        </p:nvSpPr>
-        <p:spPr>
-          <a:xfrm>
-            <a:off x="5156200" y="3937000"/>
+          <p:cNvPr id="33" name="Text 31"/>
+          <p:cNvSpPr/>
+          <p:nvPr/>
+        </p:nvSpPr>
+        <p:spPr>
+          <a:xfrm>
+            <a:off x="5156200" y="4000500"/>
             <a:ext cx="762000" cy="177800"/>
           </a:xfrm>
           <a:prstGeom prst="rect">
@@ -18475,13 +18699,13 @@
       </p:sp>
       <p:sp>
         <p:nvSpPr>
-          <p:cNvPr id="32" name="Text 30"/>
-          <p:cNvSpPr/>
-          <p:nvPr/>
-        </p:nvSpPr>
-        <p:spPr>
-          <a:xfrm>
-            <a:off x="6953250" y="3937000"/>
+          <p:cNvPr id="34" name="Text 32"/>
+          <p:cNvSpPr/>
+          <p:nvPr/>
+        </p:nvSpPr>
+        <p:spPr>
+          <a:xfrm>
+            <a:off x="6953250" y="4000500"/>
             <a:ext cx="762000" cy="177800"/>
           </a:xfrm>
           <a:prstGeom prst="rect">
@@ -18514,13 +18738,13 @@
       </p:sp>
       <p:sp>
         <p:nvSpPr>
-          <p:cNvPr id="33" name="Text 31"/>
-          <p:cNvSpPr/>
-          <p:nvPr/>
-        </p:nvSpPr>
-        <p:spPr>
-          <a:xfrm>
-            <a:off x="8743950" y="3937000"/>
+          <p:cNvPr id="35" name="Text 33"/>
+          <p:cNvSpPr/>
+          <p:nvPr/>
+        </p:nvSpPr>
+        <p:spPr>
+          <a:xfrm>
+            <a:off x="8743950" y="4000500"/>
             <a:ext cx="762000" cy="177800"/>
           </a:xfrm>
           <a:prstGeom prst="rect">
@@ -18553,13 +18777,13 @@
       </p:sp>
       <p:sp>
         <p:nvSpPr>
-          <p:cNvPr id="34" name="Text 32"/>
-          <p:cNvSpPr/>
-          <p:nvPr/>
-        </p:nvSpPr>
-        <p:spPr>
-          <a:xfrm>
-            <a:off x="10541000" y="3937000"/>
+          <p:cNvPr id="36" name="Text 34"/>
+          <p:cNvSpPr/>
+          <p:nvPr/>
+        </p:nvSpPr>
+        <p:spPr>
+          <a:xfrm>
+            <a:off x="10541000" y="4000500"/>
             <a:ext cx="762000" cy="177800"/>
           </a:xfrm>
           <a:prstGeom prst="rect">
@@ -18592,13 +18816,13 @@
       </p:sp>
       <p:sp>
         <p:nvSpPr>
-          <p:cNvPr id="35" name="Text 33"/>
-          <p:cNvSpPr/>
-          <p:nvPr/>
-        </p:nvSpPr>
-        <p:spPr>
-          <a:xfrm>
-            <a:off x="8318500" y="4102100"/>
+          <p:cNvPr id="37" name="Text 35"/>
+          <p:cNvSpPr/>
+          <p:nvPr/>
+        </p:nvSpPr>
+        <p:spPr>
+          <a:xfrm>
+            <a:off x="8318500" y="4152900"/>
             <a:ext cx="1651000" cy="165100"/>
           </a:xfrm>
           <a:prstGeom prst="rect">
@@ -18644,7 +18868,7 @@
           </p:nvPr>
         </p:nvGraphicFramePr>
         <p:xfrm>
-          <a:off x="698500" y="4394200"/>
+          <a:off x="698500" y="4419600"/>
           <a:ext cx="6858000" cy="914400"/>
         </p:xfrm>
         <a:graphic>
@@ -18652,12 +18876,12 @@
             <a:tbl>
               <a:tblPr/>
               <a:tblGrid>
-                <a:gridCol w="2667000"/>
-                <a:gridCol w="1397000"/>
-                <a:gridCol w="1397000"/>
-                <a:gridCol w="1397000"/>
+                <a:gridCol w="2743200"/>
+                <a:gridCol w="1371600"/>
+                <a:gridCol w="1371600"/>
+                <a:gridCol w="1371600"/>
               </a:tblGrid>
-              <a:tr h="292100">
+              <a:tr h="254000">
                 <a:tc>
                   <a:txBody>
                     <a:bodyPr/>
@@ -18667,7 +18891,7 @@
                         <a:buNone/>
                       </a:pPr>
                       <a:r>
-                        <a:rPr lang="en-US" sz="1000" b="1" dirty="0">
+                        <a:rPr lang="en-US" sz="950" b="1" dirty="0">
                           <a:solidFill>
                             <a:srgbClr val="FFFFFF"/>
                           </a:solidFill>
@@ -18677,7 +18901,7 @@
                         </a:rPr>
                         <a:t>Model</a:t>
                       </a:r>
-                      <a:endParaRPr lang="en-US" sz="1000" dirty="0">
+                      <a:endParaRPr lang="en-US" sz="950" dirty="0">
                         <a:latin typeface="Calibri" charset="0"/>
                         <a:ea typeface="Calibri" charset="0"/>
                         <a:cs typeface="Calibri" charset="0"/>
@@ -18717,7 +18941,7 @@
                         <a:buNone/>
                       </a:pPr>
                       <a:r>
-                        <a:rPr lang="en-US" sz="1000" b="1" dirty="0">
+                        <a:rPr lang="en-US" sz="950" b="1" dirty="0">
                           <a:solidFill>
                             <a:srgbClr val="FFFFFF"/>
                           </a:solidFill>
@@ -18727,7 +18951,7 @@
                         </a:rPr>
                         <a:t>h = 1</a:t>
                       </a:r>
-                      <a:endParaRPr lang="en-US" sz="1000" dirty="0">
+                      <a:endParaRPr lang="en-US" sz="950" dirty="0">
                         <a:latin typeface="Calibri" charset="0"/>
                         <a:ea typeface="Calibri" charset="0"/>
                         <a:cs typeface="Calibri" charset="0"/>
@@ -18767,7 +18991,7 @@
                         <a:buNone/>
                       </a:pPr>
                       <a:r>
-                        <a:rPr lang="en-US" sz="1000" b="1" dirty="0">
+                        <a:rPr lang="en-US" sz="950" b="1" dirty="0">
                           <a:solidFill>
                             <a:srgbClr val="FFFFFF"/>
                           </a:solidFill>
@@ -18777,7 +19001,7 @@
                         </a:rPr>
                         <a:t>h = 2</a:t>
                       </a:r>
-                      <a:endParaRPr lang="en-US" sz="1000" dirty="0">
+                      <a:endParaRPr lang="en-US" sz="950" dirty="0">
                         <a:latin typeface="Calibri" charset="0"/>
                         <a:ea typeface="Calibri" charset="0"/>
                         <a:cs typeface="Calibri" charset="0"/>
@@ -18817,7 +19041,7 @@
                         <a:buNone/>
                       </a:pPr>
                       <a:r>
-                        <a:rPr lang="en-US" sz="1000" b="1" dirty="0">
+                        <a:rPr lang="en-US" sz="950" b="1" dirty="0">
                           <a:solidFill>
                             <a:srgbClr val="FFFFFF"/>
                           </a:solidFill>
@@ -18827,7 +19051,7 @@
                         </a:rPr>
                         <a:t>h = 3</a:t>
                       </a:r>
-                      <a:endParaRPr lang="en-US" sz="1000" dirty="0">
+                      <a:endParaRPr lang="en-US" sz="950" dirty="0">
                         <a:latin typeface="Calibri" charset="0"/>
                         <a:ea typeface="Calibri" charset="0"/>
                         <a:cs typeface="Calibri" charset="0"/>
@@ -18859,7 +19083,7 @@
                   </a:tcPr>
                 </a:tc>
               </a:tr>
-              <a:tr h="292100">
+              <a:tr h="254000">
                 <a:tc>
                   <a:txBody>
                     <a:bodyPr/>
@@ -18869,7 +19093,7 @@
                         <a:buNone/>
                       </a:pPr>
                       <a:r>
-                        <a:rPr lang="en-US" sz="1000" dirty="0">
+                        <a:rPr lang="en-US" sz="950" dirty="0">
                           <a:solidFill>
                             <a:srgbClr val="1C2B2C"/>
                           </a:solidFill>
@@ -18877,9 +19101,9 @@
                           <a:ea typeface="Calibri" pitchFamily="34" charset="-122"/>
                           <a:cs typeface="Calibri" pitchFamily="34" charset="-120"/>
                         </a:rPr>
-                        <a:t>LSTM, range over 10 seeds</a:t>
+                        <a:t>Transformer, range over 10 seeds</a:t>
                       </a:r>
-                      <a:endParaRPr lang="en-US" sz="1000" dirty="0">
+                      <a:endParaRPr lang="en-US" sz="950" dirty="0">
                         <a:latin typeface="Calibri" charset="0"/>
                         <a:ea typeface="Calibri" charset="0"/>
                         <a:cs typeface="Calibri" charset="0"/>
@@ -18919,7 +19143,7 @@
                         <a:buNone/>
                       </a:pPr>
                       <a:r>
-                        <a:rPr lang="en-US" sz="1000" dirty="0">
+                        <a:rPr lang="en-US" sz="950" dirty="0">
                           <a:solidFill>
                             <a:srgbClr val="1C2B2C"/>
                           </a:solidFill>
@@ -18927,9 +19151,9 @@
                           <a:ea typeface="Calibri" pitchFamily="34" charset="-122"/>
                           <a:cs typeface="Calibri" pitchFamily="34" charset="-120"/>
                         </a:rPr>
-                        <a:t>0.913–0.932</a:t>
+                        <a:t>0.914–0.925</a:t>
                       </a:r>
-                      <a:endParaRPr lang="en-US" sz="1000" dirty="0">
+                      <a:endParaRPr lang="en-US" sz="950" dirty="0">
                         <a:latin typeface="Calibri" charset="0"/>
                         <a:ea typeface="Calibri" charset="0"/>
                         <a:cs typeface="Calibri" charset="0"/>
@@ -18969,7 +19193,7 @@
                         <a:buNone/>
                       </a:pPr>
                       <a:r>
-                        <a:rPr lang="en-US" sz="1000" dirty="0">
+                        <a:rPr lang="en-US" sz="950" dirty="0">
                           <a:solidFill>
                             <a:srgbClr val="1C2B2C"/>
                           </a:solidFill>
@@ -18977,9 +19201,9 @@
                           <a:ea typeface="Calibri" pitchFamily="34" charset="-122"/>
                           <a:cs typeface="Calibri" pitchFamily="34" charset="-120"/>
                         </a:rPr>
-                        <a:t>0.874–0.892</a:t>
+                        <a:t>0.870–0.893</a:t>
                       </a:r>
-                      <a:endParaRPr lang="en-US" sz="1000" dirty="0">
+                      <a:endParaRPr lang="en-US" sz="950" dirty="0">
                         <a:latin typeface="Calibri" charset="0"/>
                         <a:ea typeface="Calibri" charset="0"/>
                         <a:cs typeface="Calibri" charset="0"/>
@@ -19019,7 +19243,7 @@
                         <a:buNone/>
                       </a:pPr>
                       <a:r>
-                        <a:rPr lang="en-US" sz="1000" dirty="0">
+                        <a:rPr lang="en-US" sz="950" dirty="0">
                           <a:solidFill>
                             <a:srgbClr val="1C2B2C"/>
                           </a:solidFill>
@@ -19027,9 +19251,9 @@
                           <a:ea typeface="Calibri" pitchFamily="34" charset="-122"/>
                           <a:cs typeface="Calibri" pitchFamily="34" charset="-120"/>
                         </a:rPr>
-                        <a:t>0.824–0.847</a:t>
+                        <a:t>0.825–0.842</a:t>
                       </a:r>
-                      <a:endParaRPr lang="en-US" sz="1000" dirty="0">
+                      <a:endParaRPr lang="en-US" sz="950" dirty="0">
                         <a:latin typeface="Calibri" charset="0"/>
                         <a:ea typeface="Calibri" charset="0"/>
                         <a:cs typeface="Calibri" charset="0"/>
@@ -19061,7 +19285,7 @@
                   </a:tcPr>
                 </a:tc>
               </a:tr>
-              <a:tr h="292100">
+              <a:tr h="254000">
                 <a:tc>
                   <a:txBody>
                     <a:bodyPr/>
@@ -19071,7 +19295,7 @@
                         <a:buNone/>
                       </a:pPr>
                       <a:r>
-                        <a:rPr lang="en-US" sz="1000" dirty="0">
+                        <a:rPr lang="en-US" sz="950" dirty="0">
                           <a:solidFill>
                             <a:srgbClr val="1C2B2C"/>
                           </a:solidFill>
@@ -19079,9 +19303,9 @@
                           <a:ea typeface="Calibri" pitchFamily="34" charset="-122"/>
                           <a:cs typeface="Calibri" pitchFamily="34" charset="-120"/>
                         </a:rPr>
-                        <a:t>GRU, range over 10 seeds</a:t>
+                        <a:t>LSTM, range over 10 seeds</a:t>
                       </a:r>
-                      <a:endParaRPr lang="en-US" sz="1000" dirty="0">
+                      <a:endParaRPr lang="en-US" sz="950" dirty="0">
                         <a:latin typeface="Calibri" charset="0"/>
                         <a:ea typeface="Calibri" charset="0"/>
                         <a:cs typeface="Calibri" charset="0"/>
@@ -19121,7 +19345,7 @@
                         <a:buNone/>
                       </a:pPr>
                       <a:r>
-                        <a:rPr lang="en-US" sz="1000" dirty="0">
+                        <a:rPr lang="en-US" sz="950" dirty="0">
                           <a:solidFill>
                             <a:srgbClr val="1C2B2C"/>
                           </a:solidFill>
@@ -19129,9 +19353,9 @@
                           <a:ea typeface="Calibri" pitchFamily="34" charset="-122"/>
                           <a:cs typeface="Calibri" pitchFamily="34" charset="-120"/>
                         </a:rPr>
-                        <a:t>0.910–0.939</a:t>
+                        <a:t>0.913–0.932</a:t>
                       </a:r>
-                      <a:endParaRPr lang="en-US" sz="1000" dirty="0">
+                      <a:endParaRPr lang="en-US" sz="950" dirty="0">
                         <a:latin typeface="Calibri" charset="0"/>
                         <a:ea typeface="Calibri" charset="0"/>
                         <a:cs typeface="Calibri" charset="0"/>
@@ -19171,7 +19395,7 @@
                         <a:buNone/>
                       </a:pPr>
                       <a:r>
-                        <a:rPr lang="en-US" sz="1000" dirty="0">
+                        <a:rPr lang="en-US" sz="950" dirty="0">
                           <a:solidFill>
                             <a:srgbClr val="1C2B2C"/>
                           </a:solidFill>
@@ -19179,9 +19403,9 @@
                           <a:ea typeface="Calibri" pitchFamily="34" charset="-122"/>
                           <a:cs typeface="Calibri" pitchFamily="34" charset="-120"/>
                         </a:rPr>
-                        <a:t>0.878–0.906</a:t>
+                        <a:t>0.874–0.892</a:t>
                       </a:r>
-                      <a:endParaRPr lang="en-US" sz="1000" dirty="0">
+                      <a:endParaRPr lang="en-US" sz="950" dirty="0">
                         <a:latin typeface="Calibri" charset="0"/>
                         <a:ea typeface="Calibri" charset="0"/>
                         <a:cs typeface="Calibri" charset="0"/>
@@ -19221,7 +19445,7 @@
                         <a:buNone/>
                       </a:pPr>
                       <a:r>
-                        <a:rPr lang="en-US" sz="1000" dirty="0">
+                        <a:rPr lang="en-US" sz="950" dirty="0">
                           <a:solidFill>
                             <a:srgbClr val="1C2B2C"/>
                           </a:solidFill>
@@ -19229,9 +19453,9 @@
                           <a:ea typeface="Calibri" pitchFamily="34" charset="-122"/>
                           <a:cs typeface="Calibri" pitchFamily="34" charset="-120"/>
                         </a:rPr>
-                        <a:t>0.831–0.879</a:t>
+                        <a:t>0.824–0.847</a:t>
                       </a:r>
-                      <a:endParaRPr lang="en-US" sz="1000" dirty="0">
+                      <a:endParaRPr lang="en-US" sz="950" dirty="0">
                         <a:latin typeface="Calibri" charset="0"/>
                         <a:ea typeface="Calibri" charset="0"/>
                         <a:cs typeface="Calibri" charset="0"/>
@@ -19263,7 +19487,7 @@
                   </a:tcPr>
                 </a:tc>
               </a:tr>
-              <a:tr h="292100">
+              <a:tr h="254000">
                 <a:tc>
                   <a:txBody>
                     <a:bodyPr/>
@@ -19273,7 +19497,7 @@
                         <a:buNone/>
                       </a:pPr>
                       <a:r>
-                        <a:rPr lang="en-US" sz="1000" dirty="0">
+                        <a:rPr lang="en-US" sz="950" dirty="0">
                           <a:solidFill>
                             <a:srgbClr val="1C2B2C"/>
                           </a:solidFill>
@@ -19281,9 +19505,9 @@
                           <a:ea typeface="Calibri" pitchFamily="34" charset="-122"/>
                           <a:cs typeface="Calibri" pitchFamily="34" charset="-120"/>
                         </a:rPr>
-                        <a:t>ARIMA(1,1,1) + Fourier</a:t>
+                        <a:t>GRU, range over 10 seeds</a:t>
                       </a:r>
-                      <a:endParaRPr lang="en-US" sz="1000" dirty="0">
+                      <a:endParaRPr lang="en-US" sz="950" dirty="0">
                         <a:latin typeface="Calibri" charset="0"/>
                         <a:ea typeface="Calibri" charset="0"/>
                         <a:cs typeface="Calibri" charset="0"/>
@@ -19323,7 +19547,7 @@
                         <a:buNone/>
                       </a:pPr>
                       <a:r>
-                        <a:rPr lang="en-US" sz="1000" dirty="0">
+                        <a:rPr lang="en-US" sz="950" dirty="0">
                           <a:solidFill>
                             <a:srgbClr val="1C2B2C"/>
                           </a:solidFill>
@@ -19331,9 +19555,9 @@
                           <a:ea typeface="Calibri" pitchFamily="34" charset="-122"/>
                           <a:cs typeface="Calibri" pitchFamily="34" charset="-120"/>
                         </a:rPr>
-                        <a:t>0.940</a:t>
+                        <a:t>0.910–0.939</a:t>
                       </a:r>
-                      <a:endParaRPr lang="en-US" sz="1000" dirty="0">
+                      <a:endParaRPr lang="en-US" sz="950" dirty="0">
                         <a:latin typeface="Calibri" charset="0"/>
                         <a:ea typeface="Calibri" charset="0"/>
                         <a:cs typeface="Calibri" charset="0"/>
@@ -19373,7 +19597,7 @@
                         <a:buNone/>
                       </a:pPr>
                       <a:r>
-                        <a:rPr lang="en-US" sz="1000" dirty="0">
+                        <a:rPr lang="en-US" sz="950" dirty="0">
                           <a:solidFill>
                             <a:srgbClr val="1C2B2C"/>
                           </a:solidFill>
@@ -19381,9 +19605,9 @@
                           <a:ea typeface="Calibri" pitchFamily="34" charset="-122"/>
                           <a:cs typeface="Calibri" pitchFamily="34" charset="-120"/>
                         </a:rPr>
-                        <a:t>0.883</a:t>
+                        <a:t>0.878–0.906</a:t>
                       </a:r>
-                      <a:endParaRPr lang="en-US" sz="1000" dirty="0">
+                      <a:endParaRPr lang="en-US" sz="950" dirty="0">
                         <a:latin typeface="Calibri" charset="0"/>
                         <a:ea typeface="Calibri" charset="0"/>
                         <a:cs typeface="Calibri" charset="0"/>
@@ -19423,7 +19647,7 @@
                         <a:buNone/>
                       </a:pPr>
                       <a:r>
-                        <a:rPr lang="en-US" sz="1000" dirty="0">
+                        <a:rPr lang="en-US" sz="950" dirty="0">
                           <a:solidFill>
                             <a:srgbClr val="1C2B2C"/>
                           </a:solidFill>
@@ -19431,9 +19655,9 @@
                           <a:ea typeface="Calibri" pitchFamily="34" charset="-122"/>
                           <a:cs typeface="Calibri" pitchFamily="34" charset="-120"/>
                         </a:rPr>
-                        <a:t>0.832</a:t>
+                        <a:t>0.831–0.879</a:t>
                       </a:r>
-                      <a:endParaRPr lang="en-US" sz="1000" dirty="0">
+                      <a:endParaRPr lang="en-US" sz="950" dirty="0">
                         <a:latin typeface="Calibri" charset="0"/>
                         <a:ea typeface="Calibri" charset="0"/>
                         <a:cs typeface="Calibri" charset="0"/>
@@ -19465,7 +19689,7 @@
                   </a:tcPr>
                 </a:tc>
               </a:tr>
-              <a:tr h="292100">
+              <a:tr h="254000">
                 <a:tc>
                   <a:txBody>
                     <a:bodyPr/>
@@ -19475,7 +19699,7 @@
                         <a:buNone/>
                       </a:pPr>
                       <a:r>
-                        <a:rPr lang="en-US" sz="1000" dirty="0">
+                        <a:rPr lang="en-US" sz="950" dirty="0">
                           <a:solidFill>
                             <a:srgbClr val="1C2B2C"/>
                           </a:solidFill>
@@ -19483,9 +19707,9 @@
                           <a:ea typeface="Calibri" pitchFamily="34" charset="-122"/>
                           <a:cs typeface="Calibri" pitchFamily="34" charset="-120"/>
                         </a:rPr>
-                        <a:t>Best ML regressor (GBM, change)</a:t>
+                        <a:t>ARIMA(1,1,1) + Fourier</a:t>
                       </a:r>
-                      <a:endParaRPr lang="en-US" sz="1000" dirty="0">
+                      <a:endParaRPr lang="en-US" sz="950" dirty="0">
                         <a:latin typeface="Calibri" charset="0"/>
                         <a:ea typeface="Calibri" charset="0"/>
                         <a:cs typeface="Calibri" charset="0"/>
@@ -19525,7 +19749,7 @@
                         <a:buNone/>
                       </a:pPr>
                       <a:r>
-                        <a:rPr lang="en-US" sz="1000" dirty="0">
+                        <a:rPr lang="en-US" sz="950" dirty="0">
                           <a:solidFill>
                             <a:srgbClr val="1C2B2C"/>
                           </a:solidFill>
@@ -19533,9 +19757,9 @@
                           <a:ea typeface="Calibri" pitchFamily="34" charset="-122"/>
                           <a:cs typeface="Calibri" pitchFamily="34" charset="-120"/>
                         </a:rPr>
-                        <a:t>0.983</a:t>
+                        <a:t>0.940</a:t>
                       </a:r>
-                      <a:endParaRPr lang="en-US" sz="1000" dirty="0">
+                      <a:endParaRPr lang="en-US" sz="950" dirty="0">
                         <a:latin typeface="Calibri" charset="0"/>
                         <a:ea typeface="Calibri" charset="0"/>
                         <a:cs typeface="Calibri" charset="0"/>
@@ -19575,7 +19799,7 @@
                         <a:buNone/>
                       </a:pPr>
                       <a:r>
-                        <a:rPr lang="en-US" sz="1000" dirty="0">
+                        <a:rPr lang="en-US" sz="950" dirty="0">
                           <a:solidFill>
                             <a:srgbClr val="1C2B2C"/>
                           </a:solidFill>
@@ -19583,9 +19807,9 @@
                           <a:ea typeface="Calibri" pitchFamily="34" charset="-122"/>
                           <a:cs typeface="Calibri" pitchFamily="34" charset="-120"/>
                         </a:rPr>
-                        <a:t>0.937</a:t>
+                        <a:t>0.883</a:t>
                       </a:r>
-                      <a:endParaRPr lang="en-US" sz="1000" dirty="0">
+                      <a:endParaRPr lang="en-US" sz="950" dirty="0">
                         <a:latin typeface="Calibri" charset="0"/>
                         <a:ea typeface="Calibri" charset="0"/>
                         <a:cs typeface="Calibri" charset="0"/>
@@ -19625,7 +19849,7 @@
                         <a:buNone/>
                       </a:pPr>
                       <a:r>
-                        <a:rPr lang="en-US" sz="1000" dirty="0">
+                        <a:rPr lang="en-US" sz="950" dirty="0">
                           <a:solidFill>
                             <a:srgbClr val="1C2B2C"/>
                           </a:solidFill>
@@ -19633,9 +19857,9 @@
                           <a:ea typeface="Calibri" pitchFamily="34" charset="-122"/>
                           <a:cs typeface="Calibri" pitchFamily="34" charset="-120"/>
                         </a:rPr>
-                        <a:t>0.878</a:t>
+                        <a:t>0.832</a:t>
                       </a:r>
-                      <a:endParaRPr lang="en-US" sz="1000" dirty="0">
+                      <a:endParaRPr lang="en-US" sz="950" dirty="0">
                         <a:latin typeface="Calibri" charset="0"/>
                         <a:ea typeface="Calibri" charset="0"/>
                         <a:cs typeface="Calibri" charset="0"/>
@@ -19667,7 +19891,7 @@
                   </a:tcPr>
                 </a:tc>
               </a:tr>
-              <a:tr h="292100">
+              <a:tr h="254000">
                 <a:tc>
                   <a:txBody>
                     <a:bodyPr/>
@@ -19677,7 +19901,7 @@
                         <a:buNone/>
                       </a:pPr>
                       <a:r>
-                        <a:rPr lang="en-US" sz="1000" dirty="0">
+                        <a:rPr lang="en-US" sz="950" dirty="0">
                           <a:solidFill>
                             <a:srgbClr val="1C2B2C"/>
                           </a:solidFill>
@@ -19685,9 +19909,9 @@
                           <a:ea typeface="Calibri" pitchFamily="34" charset="-122"/>
                           <a:cs typeface="Calibri" pitchFamily="34" charset="-120"/>
                         </a:rPr>
-                        <a:t>Persistence</a:t>
+                        <a:t>Best ML regressor (GBM, change)</a:t>
                       </a:r>
-                      <a:endParaRPr lang="en-US" sz="1000" dirty="0">
+                      <a:endParaRPr lang="en-US" sz="950" dirty="0">
                         <a:latin typeface="Calibri" charset="0"/>
                         <a:ea typeface="Calibri" charset="0"/>
                         <a:cs typeface="Calibri" charset="0"/>
@@ -19727,7 +19951,7 @@
                         <a:buNone/>
                       </a:pPr>
                       <a:r>
-                        <a:rPr lang="en-US" sz="1000" dirty="0">
+                        <a:rPr lang="en-US" sz="950" dirty="0">
                           <a:solidFill>
                             <a:srgbClr val="1C2B2C"/>
                           </a:solidFill>
@@ -19735,9 +19959,9 @@
                           <a:ea typeface="Calibri" pitchFamily="34" charset="-122"/>
                           <a:cs typeface="Calibri" pitchFamily="34" charset="-120"/>
                         </a:rPr>
-                        <a:t>1.000</a:t>
+                        <a:t>0.983</a:t>
                       </a:r>
-                      <a:endParaRPr lang="en-US" sz="1000" dirty="0">
+                      <a:endParaRPr lang="en-US" sz="950" dirty="0">
                         <a:latin typeface="Calibri" charset="0"/>
                         <a:ea typeface="Calibri" charset="0"/>
                         <a:cs typeface="Calibri" charset="0"/>
@@ -19777,7 +20001,7 @@
                         <a:buNone/>
                       </a:pPr>
                       <a:r>
-                        <a:rPr lang="en-US" sz="1000" dirty="0">
+                        <a:rPr lang="en-US" sz="950" dirty="0">
                           <a:solidFill>
                             <a:srgbClr val="1C2B2C"/>
                           </a:solidFill>
@@ -19785,9 +20009,9 @@
                           <a:ea typeface="Calibri" pitchFamily="34" charset="-122"/>
                           <a:cs typeface="Calibri" pitchFamily="34" charset="-120"/>
                         </a:rPr>
-                        <a:t>1.000</a:t>
+                        <a:t>0.937</a:t>
                       </a:r>
-                      <a:endParaRPr lang="en-US" sz="1000" dirty="0">
+                      <a:endParaRPr lang="en-US" sz="950" dirty="0">
                         <a:latin typeface="Calibri" charset="0"/>
                         <a:ea typeface="Calibri" charset="0"/>
                         <a:cs typeface="Calibri" charset="0"/>
@@ -19827,7 +20051,109 @@
                         <a:buNone/>
                       </a:pPr>
                       <a:r>
-                        <a:rPr lang="en-US" sz="1000" dirty="0">
+                        <a:rPr lang="en-US" sz="950" dirty="0">
+                          <a:solidFill>
+                            <a:srgbClr val="1C2B2C"/>
+                          </a:solidFill>
+                          <a:latin typeface="Calibri" pitchFamily="34" charset="0"/>
+                          <a:ea typeface="Calibri" pitchFamily="34" charset="-122"/>
+                          <a:cs typeface="Calibri" pitchFamily="34" charset="-120"/>
+                        </a:rPr>
+                        <a:t>0.878</a:t>
+                      </a:r>
+                      <a:endParaRPr lang="en-US" sz="950" dirty="0">
+                        <a:latin typeface="Calibri" charset="0"/>
+                        <a:ea typeface="Calibri" charset="0"/>
+                        <a:cs typeface="Calibri" charset="0"/>
+                      </a:endParaRPr>
+                    </a:p>
+                  </a:txBody>
+                  <a:tcPr marL="127000" marR="127000" marT="50800" marB="50800" anchor="ctr">
+                    <a:lnL w="0" cap="flat" cmpd="sng" algn="ctr">
+                      <a:noFill/>
+                    </a:lnL>
+                    <a:lnR w="0" cap="flat" cmpd="sng" algn="ctr">
+                      <a:noFill/>
+                    </a:lnR>
+                    <a:lnT w="0" cap="flat" cmpd="sng" algn="ctr">
+                      <a:noFill/>
+                    </a:lnT>
+                    <a:lnB w="9525" cap="flat" cmpd="sng" algn="ctr">
+                      <a:solidFill>
+                        <a:srgbClr val="DCE3E3"/>
+                      </a:solidFill>
+                      <a:prstDash val="solid"/>
+                      <a:round/>
+                      <a:headEnd type="none" w="med" len="med"/>
+                      <a:tailEnd type="none" w="med" len="med"/>
+                    </a:lnB>
+                    <a:solidFill>
+                      <a:srgbClr val="FFFFFF"/>
+                    </a:solidFill>
+                  </a:tcPr>
+                </a:tc>
+              </a:tr>
+              <a:tr h="254000">
+                <a:tc>
+                  <a:txBody>
+                    <a:bodyPr/>
+                    <a:lstStyle/>
+                    <a:p>
+                      <a:pPr algn="ctr" indent="0" marL="0">
+                        <a:buNone/>
+                      </a:pPr>
+                      <a:r>
+                        <a:rPr lang="en-US" sz="950" dirty="0">
+                          <a:solidFill>
+                            <a:srgbClr val="1C2B2C"/>
+                          </a:solidFill>
+                          <a:latin typeface="Calibri" pitchFamily="34" charset="0"/>
+                          <a:ea typeface="Calibri" pitchFamily="34" charset="-122"/>
+                          <a:cs typeface="Calibri" pitchFamily="34" charset="-120"/>
+                        </a:rPr>
+                        <a:t>Persistence</a:t>
+                      </a:r>
+                      <a:endParaRPr lang="en-US" sz="950" dirty="0">
+                        <a:latin typeface="Calibri" charset="0"/>
+                        <a:ea typeface="Calibri" charset="0"/>
+                        <a:cs typeface="Calibri" charset="0"/>
+                      </a:endParaRPr>
+                    </a:p>
+                  </a:txBody>
+                  <a:tcPr marL="127000" marR="127000" marT="50800" marB="50800" anchor="ctr">
+                    <a:lnL w="0" cap="flat" cmpd="sng" algn="ctr">
+                      <a:noFill/>
+                    </a:lnL>
+                    <a:lnR w="0" cap="flat" cmpd="sng" algn="ctr">
+                      <a:noFill/>
+                    </a:lnR>
+                    <a:lnT w="0" cap="flat" cmpd="sng" algn="ctr">
+                      <a:noFill/>
+                    </a:lnT>
+                    <a:lnB w="9525" cap="flat" cmpd="sng" algn="ctr">
+                      <a:solidFill>
+                        <a:srgbClr val="DCE3E3"/>
+                      </a:solidFill>
+                      <a:prstDash val="solid"/>
+                      <a:round/>
+                      <a:headEnd type="none" w="med" len="med"/>
+                      <a:tailEnd type="none" w="med" len="med"/>
+                    </a:lnB>
+                    <a:solidFill>
+                      <a:srgbClr val="FFFFFF"/>
+                    </a:solidFill>
+                  </a:tcPr>
+                </a:tc>
+                <a:tc>
+                  <a:txBody>
+                    <a:bodyPr/>
+                    <a:lstStyle/>
+                    <a:p>
+                      <a:pPr algn="ctr" indent="0" marL="0">
+                        <a:buNone/>
+                      </a:pPr>
+                      <a:r>
+                        <a:rPr lang="en-US" sz="950" dirty="0">
                           <a:solidFill>
                             <a:srgbClr val="1C2B2C"/>
                           </a:solidFill>
@@ -19837,7 +20163,107 @@
                         </a:rPr>
                         <a:t>1.000</a:t>
                       </a:r>
-                      <a:endParaRPr lang="en-US" sz="1000" dirty="0">
+                      <a:endParaRPr lang="en-US" sz="950" dirty="0">
+                        <a:latin typeface="Calibri" charset="0"/>
+                        <a:ea typeface="Calibri" charset="0"/>
+                        <a:cs typeface="Calibri" charset="0"/>
+                      </a:endParaRPr>
+                    </a:p>
+                  </a:txBody>
+                  <a:tcPr marL="127000" marR="127000" marT="50800" marB="50800" anchor="ctr">
+                    <a:lnL w="0" cap="flat" cmpd="sng" algn="ctr">
+                      <a:noFill/>
+                    </a:lnL>
+                    <a:lnR w="0" cap="flat" cmpd="sng" algn="ctr">
+                      <a:noFill/>
+                    </a:lnR>
+                    <a:lnT w="0" cap="flat" cmpd="sng" algn="ctr">
+                      <a:noFill/>
+                    </a:lnT>
+                    <a:lnB w="9525" cap="flat" cmpd="sng" algn="ctr">
+                      <a:solidFill>
+                        <a:srgbClr val="DCE3E3"/>
+                      </a:solidFill>
+                      <a:prstDash val="solid"/>
+                      <a:round/>
+                      <a:headEnd type="none" w="med" len="med"/>
+                      <a:tailEnd type="none" w="med" len="med"/>
+                    </a:lnB>
+                    <a:solidFill>
+                      <a:srgbClr val="FFFFFF"/>
+                    </a:solidFill>
+                  </a:tcPr>
+                </a:tc>
+                <a:tc>
+                  <a:txBody>
+                    <a:bodyPr/>
+                    <a:lstStyle/>
+                    <a:p>
+                      <a:pPr algn="ctr" indent="0" marL="0">
+                        <a:buNone/>
+                      </a:pPr>
+                      <a:r>
+                        <a:rPr lang="en-US" sz="950" dirty="0">
+                          <a:solidFill>
+                            <a:srgbClr val="1C2B2C"/>
+                          </a:solidFill>
+                          <a:latin typeface="Calibri" pitchFamily="34" charset="0"/>
+                          <a:ea typeface="Calibri" pitchFamily="34" charset="-122"/>
+                          <a:cs typeface="Calibri" pitchFamily="34" charset="-120"/>
+                        </a:rPr>
+                        <a:t>1.000</a:t>
+                      </a:r>
+                      <a:endParaRPr lang="en-US" sz="950" dirty="0">
+                        <a:latin typeface="Calibri" charset="0"/>
+                        <a:ea typeface="Calibri" charset="0"/>
+                        <a:cs typeface="Calibri" charset="0"/>
+                      </a:endParaRPr>
+                    </a:p>
+                  </a:txBody>
+                  <a:tcPr marL="127000" marR="127000" marT="50800" marB="50800" anchor="ctr">
+                    <a:lnL w="0" cap="flat" cmpd="sng" algn="ctr">
+                      <a:noFill/>
+                    </a:lnL>
+                    <a:lnR w="0" cap="flat" cmpd="sng" algn="ctr">
+                      <a:noFill/>
+                    </a:lnR>
+                    <a:lnT w="0" cap="flat" cmpd="sng" algn="ctr">
+                      <a:noFill/>
+                    </a:lnT>
+                    <a:lnB w="9525" cap="flat" cmpd="sng" algn="ctr">
+                      <a:solidFill>
+                        <a:srgbClr val="DCE3E3"/>
+                      </a:solidFill>
+                      <a:prstDash val="solid"/>
+                      <a:round/>
+                      <a:headEnd type="none" w="med" len="med"/>
+                      <a:tailEnd type="none" w="med" len="med"/>
+                    </a:lnB>
+                    <a:solidFill>
+                      <a:srgbClr val="FFFFFF"/>
+                    </a:solidFill>
+                  </a:tcPr>
+                </a:tc>
+                <a:tc>
+                  <a:txBody>
+                    <a:bodyPr/>
+                    <a:lstStyle/>
+                    <a:p>
+                      <a:pPr algn="ctr" indent="0" marL="0">
+                        <a:buNone/>
+                      </a:pPr>
+                      <a:r>
+                        <a:rPr lang="en-US" sz="950" dirty="0">
+                          <a:solidFill>
+                            <a:srgbClr val="1C2B2C"/>
+                          </a:solidFill>
+                          <a:latin typeface="Calibri" pitchFamily="34" charset="0"/>
+                          <a:ea typeface="Calibri" pitchFamily="34" charset="-122"/>
+                          <a:cs typeface="Calibri" pitchFamily="34" charset="-120"/>
+                        </a:rPr>
+                        <a:t>1.000</a:t>
+                      </a:r>
+                      <a:endParaRPr lang="en-US" sz="950" dirty="0">
                         <a:latin typeface="Calibri" charset="0"/>
                         <a:ea typeface="Calibri" charset="0"/>
                         <a:cs typeface="Calibri" charset="0"/>
@@ -19875,18 +20301,18 @@
       </p:graphicFrame>
       <p:sp>
         <p:nvSpPr>
-          <p:cNvPr id="37" name="Shape 34"/>
-          <p:cNvSpPr/>
-          <p:nvPr/>
-        </p:nvSpPr>
-        <p:spPr>
-          <a:xfrm>
-            <a:off x="7810500" y="4394200"/>
-            <a:ext cx="3683000" cy="1803400"/>
+          <p:cNvPr id="39" name="Shape 36"/>
+          <p:cNvSpPr/>
+          <p:nvPr/>
+        </p:nvSpPr>
+        <p:spPr>
+          <a:xfrm>
+            <a:off x="7810500" y="4419600"/>
+            <a:ext cx="3683000" cy="1778000"/>
           </a:xfrm>
           <a:prstGeom prst="roundRect">
             <a:avLst>
-              <a:gd name="adj" fmla="val 7099"/>
+              <a:gd name="adj" fmla="val 7200"/>
             </a:avLst>
           </a:prstGeom>
           <a:solidFill>
@@ -19897,14 +20323,14 @@
       </p:sp>
       <p:sp>
         <p:nvSpPr>
-          <p:cNvPr id="38" name="Text 35"/>
-          <p:cNvSpPr/>
-          <p:nvPr/>
-        </p:nvSpPr>
-        <p:spPr>
-          <a:xfrm>
-            <a:off x="8115300" y="4546600"/>
-            <a:ext cx="3111500" cy="660400"/>
+          <p:cNvPr id="40" name="Text 37"/>
+          <p:cNvSpPr/>
+          <p:nvPr/>
+        </p:nvSpPr>
+        <p:spPr>
+          <a:xfrm>
+            <a:off x="8115300" y="4559300"/>
+            <a:ext cx="3111500" cy="635000"/>
           </a:xfrm>
           <a:prstGeom prst="rect">
             <a:avLst/>
@@ -19920,7 +20346,7 @@
               <a:buNone/>
             </a:pPr>
             <a:r>
-              <a:rPr lang="en-US" sz="4300" b="1" dirty="0">
+              <a:rPr lang="en-US" sz="4200" b="1" dirty="0">
                 <a:solidFill>
                   <a:srgbClr val="E35D45"/>
                 </a:solidFill>
@@ -19930,20 +20356,20 @@
               </a:rPr>
               <a:t>15 / 15</a:t>
             </a:r>
-            <a:endParaRPr lang="en-US" sz="4300" dirty="0"/>
-          </a:p>
-        </p:txBody>
-      </p:sp>
-      <p:sp>
-        <p:nvSpPr>
-          <p:cNvPr id="39" name="Text 36"/>
-          <p:cNvSpPr/>
-          <p:nvPr/>
-        </p:nvSpPr>
-        <p:spPr>
-          <a:xfrm>
-            <a:off x="8115300" y="5219700"/>
-            <a:ext cx="3111500" cy="863600"/>
+            <a:endParaRPr lang="en-US" sz="4200" dirty="0"/>
+          </a:p>
+        </p:txBody>
+      </p:sp>
+      <p:sp>
+        <p:nvSpPr>
+          <p:cNvPr id="41" name="Text 38"/>
+          <p:cNvSpPr/>
+          <p:nvPr/>
+        </p:nvSpPr>
+        <p:spPr>
+          <a:xfrm>
+            <a:off x="8115300" y="5207000"/>
+            <a:ext cx="3111500" cy="889000"/>
           </a:xfrm>
           <a:prstGeom prst="rect">
             <a:avLst/>
@@ -19970,7 +20396,7 @@
                 <a:ea typeface="Calibri" pitchFamily="34" charset="-122"/>
                 <a:cs typeface="Calibri" pitchFamily="34" charset="-120"/>
               </a:rPr>
-              <a:t>Diebold-Mariano pairings favour ARIMA over every machine learning regressor, at every horizon. Fourteen reach p &lt; 0.05. Both networks are the exception, and only at one day ahead.</a:t>
+              <a:t>Diebold-Mariano pairings favour ARIMA over every machine learning regressor, at every horizon. Fourteen reach p &lt; 0.05. The three networks are the exception, and only at one day ahead.</a:t>
             </a:r>
             <a:endParaRPr lang="en-US" sz="1100" dirty="0"/>
           </a:p>
@@ -20588,7 +21014,7 @@
                 <a:ea typeface="Calibri" pitchFamily="34" charset="-122"/>
                 <a:cs typeface="Calibri" pitchFamily="34" charset="-120"/>
               </a:rPr>
-              <a:t>Data, two real defects, eleven models, one evaluation harness</a:t>
+              <a:t>Data, two real defects, twelve models, one evaluation harness</a:t>
             </a:r>
             <a:endParaRPr lang="en-US" sz="1050" dirty="0"/>
           </a:p>
@@ -28200,7 +28626,7 @@
                 <a:ea typeface="Calibri" pitchFamily="34" charset="-122"/>
                 <a:cs typeface="Calibri" pitchFamily="34" charset="-120"/>
               </a:rPr>
-              <a:t>Limitations III — what the second review added</a:t>
+              <a:t>Limitations III — what the supervisor reviews added</a:t>
             </a:r>
             <a:endParaRPr lang="en-US" sz="2900" dirty="0"/>
           </a:p>
@@ -28235,109 +28661,6 @@
         <p:spPr>
           <a:xfrm>
             <a:off x="698500" y="1790700"/>
-            <a:ext cx="5270500" cy="2095500"/>
-          </a:xfrm>
-          <a:prstGeom prst="roundRect">
-            <a:avLst>
-              <a:gd name="adj" fmla="val 6109"/>
-            </a:avLst>
-          </a:prstGeom>
-          <a:solidFill>
-            <a:srgbClr val="16343A"/>
-          </a:solidFill>
-          <a:ln/>
-        </p:spPr>
-      </p:sp>
-      <p:sp>
-        <p:nvSpPr>
-          <p:cNvPr id="6" name="Text 4"/>
-          <p:cNvSpPr/>
-          <p:nvPr/>
-        </p:nvSpPr>
-        <p:spPr>
-          <a:xfrm>
-            <a:off x="990600" y="2006600"/>
-            <a:ext cx="4699000" cy="203200"/>
-          </a:xfrm>
-          <a:prstGeom prst="rect">
-            <a:avLst/>
-          </a:prstGeom>
-          <a:noFill/>
-          <a:ln/>
-        </p:spPr>
-        <p:txBody>
-          <a:bodyPr wrap="square" rtlCol="0" anchor="ctr"/>
-          <a:lstStyle/>
-          <a:p>
-            <a:pPr indent="0" marL="0">
-              <a:buNone/>
-            </a:pPr>
-            <a:r>
-              <a:rPr lang="en-US" sz="900" b="1" spc="140" kern="0" dirty="0">
-                <a:solidFill>
-                  <a:srgbClr val="F0A999"/>
-                </a:solidFill>
-                <a:latin typeface="Calibri" pitchFamily="34" charset="0"/>
-                <a:ea typeface="Calibri" pitchFamily="34" charset="-122"/>
-                <a:cs typeface="Calibri" pitchFamily="34" charset="-120"/>
-              </a:rPr>
-              <a:t>OPTIMISER AND LEARNING RATE — BOUNDED CHECK</a:t>
-            </a:r>
-            <a:endParaRPr lang="en-US" sz="900" dirty="0"/>
-          </a:p>
-        </p:txBody>
-      </p:sp>
-      <p:sp>
-        <p:nvSpPr>
-          <p:cNvPr id="7" name="Text 5"/>
-          <p:cNvSpPr/>
-          <p:nvPr/>
-        </p:nvSpPr>
-        <p:spPr>
-          <a:xfrm>
-            <a:off x="990600" y="2298700"/>
-            <a:ext cx="4699000" cy="1409700"/>
-          </a:xfrm>
-          <a:prstGeom prst="rect">
-            <a:avLst/>
-          </a:prstGeom>
-          <a:noFill/>
-          <a:ln/>
-        </p:spPr>
-        <p:txBody>
-          <a:bodyPr wrap="square" rtlCol="0" anchor="t"/>
-          <a:lstStyle/>
-          <a:p>
-            <a:pPr indent="0" marL="0">
-              <a:lnSpc>
-                <a:spcPct val="140000"/>
-              </a:lnSpc>
-              <a:buNone/>
-            </a:pPr>
-            <a:r>
-              <a:rPr lang="en-US" sz="1100" dirty="0">
-                <a:solidFill>
-                  <a:srgbClr val="FFFFFF"/>
-                </a:solidFill>
-                <a:latin typeface="Calibri" pitchFamily="34" charset="0"/>
-                <a:ea typeface="Calibri" pitchFamily="34" charset="-122"/>
-                <a:cs typeface="Calibri" pitchFamily="34" charset="-120"/>
-              </a:rPr>
-              <a:t>Adam at 0.01 is at or near the best setting tried at one and two days. At three days SGD with momentum beats it by about two points, 0.839 against 0.858, with a tighter seed spread. Three separate bounded checks now agree that the three-day configuration is the one this project would least defend.</a:t>
-            </a:r>
-            <a:endParaRPr lang="en-US" sz="1100" dirty="0"/>
-          </a:p>
-        </p:txBody>
-      </p:sp>
-      <p:sp>
-        <p:nvSpPr>
-          <p:cNvPr id="8" name="Shape 6"/>
-          <p:cNvSpPr/>
-          <p:nvPr/>
-        </p:nvSpPr>
-        <p:spPr>
-          <a:xfrm>
-            <a:off x="6223000" y="1790700"/>
             <a:ext cx="5270500" cy="2095500"/>
           </a:xfrm>
           <a:prstGeom prst="roundRect">
@@ -28360,13 +28683,13 @@
       </p:sp>
       <p:sp>
         <p:nvSpPr>
-          <p:cNvPr id="9" name="Text 7"/>
-          <p:cNvSpPr/>
-          <p:nvPr/>
-        </p:nvSpPr>
-        <p:spPr>
-          <a:xfrm>
-            <a:off x="6515100" y="2006600"/>
+          <p:cNvPr id="6" name="Text 4"/>
+          <p:cNvSpPr/>
+          <p:nvPr/>
+        </p:nvSpPr>
+        <p:spPr>
+          <a:xfrm>
+            <a:off x="990600" y="2006600"/>
             <a:ext cx="4699000" cy="203200"/>
           </a:xfrm>
           <a:prstGeom prst="rect">
@@ -28391,7 +28714,7 @@
                 <a:ea typeface="Calibri" pitchFamily="34" charset="-122"/>
                 <a:cs typeface="Calibri" pitchFamily="34" charset="-120"/>
               </a:rPr>
-              <a:t>THE LSTM’S SCOPE, STATED PLAINLY</a:t>
+              <a:t>OPTIMISER AND LEARNING RATE — BOUNDED CHECK</a:t>
             </a:r>
             <a:endParaRPr lang="en-US" sz="900" dirty="0"/>
           </a:p>
@@ -28399,13 +28722,13 @@
       </p:sp>
       <p:sp>
         <p:nvSpPr>
-          <p:cNvPr id="10" name="Text 8"/>
-          <p:cNvSpPr/>
-          <p:nvPr/>
-        </p:nvSpPr>
-        <p:spPr>
-          <a:xfrm>
-            <a:off x="6515100" y="2298700"/>
+          <p:cNvPr id="7" name="Text 5"/>
+          <p:cNvSpPr/>
+          <p:nvPr/>
+        </p:nvSpPr>
+        <p:spPr>
+          <a:xfrm>
+            <a:off x="990600" y="2298700"/>
             <a:ext cx="4699000" cy="1409700"/>
           </a:xfrm>
           <a:prstGeom prst="rect">
@@ -28433,7 +28756,7 @@
                 <a:ea typeface="Calibri" pitchFamily="34" charset="-122"/>
                 <a:cs typeface="Calibri" pitchFamily="34" charset="-120"/>
               </a:rPr>
-              <a:t>It was held to the same ten-seed rolling-origin evaluation as the GRU for accuracy, and no further: no weather channels, no threshold sweep. It appears in the accuracy and significance tables and nowhere in the warning-system tables. Not tested because the marginal evidence did not justify the compute, not because a result was avoided.</a:t>
+              <a:t>Adam at 0.01 is at or near the best setting tried at one and two days. At three days SGD with momentum beats it by about two points, 0.839 against 0.858, with a tighter seed spread. Three separate bounded checks now agree that the three-day configuration is the one this project would least defend.</a:t>
             </a:r>
             <a:endParaRPr lang="en-US" sz="1100" dirty="0"/>
           </a:p>
@@ -28441,18 +28764,18 @@
       </p:sp>
       <p:sp>
         <p:nvSpPr>
-          <p:cNvPr id="11" name="Shape 9"/>
-          <p:cNvSpPr/>
-          <p:nvPr/>
-        </p:nvSpPr>
-        <p:spPr>
-          <a:xfrm>
-            <a:off x="698500" y="4140200"/>
-            <a:ext cx="5270500" cy="2057400"/>
+          <p:cNvPr id="8" name="Shape 6"/>
+          <p:cNvSpPr/>
+          <p:nvPr/>
+        </p:nvSpPr>
+        <p:spPr>
+          <a:xfrm>
+            <a:off x="6223000" y="1790700"/>
+            <a:ext cx="5270500" cy="2095500"/>
           </a:xfrm>
           <a:prstGeom prst="roundRect">
             <a:avLst>
-              <a:gd name="adj" fmla="val 6222"/>
+              <a:gd name="adj" fmla="val 6109"/>
             </a:avLst>
           </a:prstGeom>
           <a:solidFill>
@@ -28470,13 +28793,13 @@
       </p:sp>
       <p:sp>
         <p:nvSpPr>
-          <p:cNvPr id="12" name="Text 10"/>
-          <p:cNvSpPr/>
-          <p:nvPr/>
-        </p:nvSpPr>
-        <p:spPr>
-          <a:xfrm>
-            <a:off x="990600" y="4356100"/>
+          <p:cNvPr id="9" name="Text 7"/>
+          <p:cNvSpPr/>
+          <p:nvPr/>
+        </p:nvSpPr>
+        <p:spPr>
+          <a:xfrm>
+            <a:off x="6515100" y="2006600"/>
             <a:ext cx="4699000" cy="203200"/>
           </a:xfrm>
           <a:prstGeom prst="rect">
@@ -28501,7 +28824,7 @@
                 <a:ea typeface="Calibri" pitchFamily="34" charset="-122"/>
                 <a:cs typeface="Calibri" pitchFamily="34" charset="-120"/>
               </a:rPr>
-              <a:t>A SMALL TRANSFORMER — BOUNDED CHECK</a:t>
+              <a:t>THE LSTM AND TRANSFORMER SCOPE, STATED PLAINLY</a:t>
             </a:r>
             <a:endParaRPr lang="en-US" sz="900" dirty="0"/>
           </a:p>
@@ -28509,13 +28832,13 @@
       </p:sp>
       <p:sp>
         <p:nvSpPr>
-          <p:cNvPr id="13" name="Text 11"/>
-          <p:cNvSpPr/>
-          <p:nvPr/>
-        </p:nvSpPr>
-        <p:spPr>
-          <a:xfrm>
-            <a:off x="990600" y="4648200"/>
+          <p:cNvPr id="10" name="Text 8"/>
+          <p:cNvSpPr/>
+          <p:nvPr/>
+        </p:nvSpPr>
+        <p:spPr>
+          <a:xfrm>
+            <a:off x="6515100" y="2298700"/>
             <a:ext cx="4699000" cy="1409700"/>
           </a:xfrm>
           <a:prstGeom prst="rect">
@@ -28543,7 +28866,110 @@
                 <a:ea typeface="Calibri" pitchFamily="34" charset="-122"/>
                 <a:cs typeface="Calibri" pitchFamily="34" charset="-120"/>
               </a:rPr>
-              <a:t>Sixteen-dimensional embeddings, two heads, one encoder layer. It does not beat ARIMA at any horizon, consistent with the small-data argument. But it is ahead of the GRU at one and three days, which that argument did not predict.</a:t>
+              <a:t>Both were held to the same ten-seed rolling-origin evaluation as the GRU for accuracy, and no further: no weather channels, no threshold sweep for either. Both appear in the accuracy and significance tables and nowhere in the warning-system tables. Not tested because the marginal evidence did not justify the compute, not because a result was avoided.</a:t>
+            </a:r>
+            <a:endParaRPr lang="en-US" sz="1100" dirty="0"/>
+          </a:p>
+        </p:txBody>
+      </p:sp>
+      <p:sp>
+        <p:nvSpPr>
+          <p:cNvPr id="11" name="Shape 9"/>
+          <p:cNvSpPr/>
+          <p:nvPr/>
+        </p:nvSpPr>
+        <p:spPr>
+          <a:xfrm>
+            <a:off x="698500" y="4140200"/>
+            <a:ext cx="5270500" cy="2057400"/>
+          </a:xfrm>
+          <a:prstGeom prst="roundRect">
+            <a:avLst>
+              <a:gd name="adj" fmla="val 6222"/>
+            </a:avLst>
+          </a:prstGeom>
+          <a:solidFill>
+            <a:srgbClr val="16343A"/>
+          </a:solidFill>
+          <a:ln/>
+        </p:spPr>
+      </p:sp>
+      <p:sp>
+        <p:nvSpPr>
+          <p:cNvPr id="12" name="Text 10"/>
+          <p:cNvSpPr/>
+          <p:nvPr/>
+        </p:nvSpPr>
+        <p:spPr>
+          <a:xfrm>
+            <a:off x="990600" y="4356100"/>
+            <a:ext cx="4699000" cy="203200"/>
+          </a:xfrm>
+          <a:prstGeom prst="rect">
+            <a:avLst/>
+          </a:prstGeom>
+          <a:noFill/>
+          <a:ln/>
+        </p:spPr>
+        <p:txBody>
+          <a:bodyPr wrap="square" rtlCol="0" anchor="ctr"/>
+          <a:lstStyle/>
+          <a:p>
+            <a:pPr indent="0" marL="0">
+              <a:buNone/>
+            </a:pPr>
+            <a:r>
+              <a:rPr lang="en-US" sz="900" b="1" spc="140" kern="0" dirty="0">
+                <a:solidFill>
+                  <a:srgbClr val="F0A999"/>
+                </a:solidFill>
+                <a:latin typeface="Calibri" pitchFamily="34" charset="0"/>
+                <a:ea typeface="Calibri" pitchFamily="34" charset="-122"/>
+                <a:cs typeface="Calibri" pitchFamily="34" charset="-120"/>
+              </a:rPr>
+              <a:t>THE TRANSFORMER, PROMOTED OUT OF THIS LIST</a:t>
+            </a:r>
+            <a:endParaRPr lang="en-US" sz="900" dirty="0"/>
+          </a:p>
+        </p:txBody>
+      </p:sp>
+      <p:sp>
+        <p:nvSpPr>
+          <p:cNvPr id="13" name="Text 11"/>
+          <p:cNvSpPr/>
+          <p:nvPr/>
+        </p:nvSpPr>
+        <p:spPr>
+          <a:xfrm>
+            <a:off x="990600" y="4648200"/>
+            <a:ext cx="4699000" cy="1409700"/>
+          </a:xfrm>
+          <a:prstGeom prst="rect">
+            <a:avLst/>
+          </a:prstGeom>
+          <a:noFill/>
+          <a:ln/>
+        </p:spPr>
+        <p:txBody>
+          <a:bodyPr wrap="square" rtlCol="0" anchor="t"/>
+          <a:lstStyle/>
+          <a:p>
+            <a:pPr indent="0" marL="0">
+              <a:lnSpc>
+                <a:spcPct val="140000"/>
+              </a:lnSpc>
+              <a:buNone/>
+            </a:pPr>
+            <a:r>
+              <a:rPr lang="en-US" sz="1100" dirty="0">
+                <a:solidFill>
+                  <a:srgbClr val="FFFFFF"/>
+                </a:solidFill>
+                <a:latin typeface="Calibri" pitchFamily="34" charset="0"/>
+                <a:ea typeface="Calibri" pitchFamily="34" charset="-122"/>
+                <a:cs typeface="Calibri" pitchFamily="34" charset="-120"/>
+              </a:rPr>
+              <a:t>It began here as a bounded check. Dr Tian challenged the small-data premise directly — some four thousand days clears the threshold he had seen cited — so it was given the full ten-seed treatment. It beats the GRU in 8 of 10 matched seeds at every horizon and carries the strongest formal result against ARIMA at one day ahead, 7 of 10 seeds.</a:t>
             </a:r>
             <a:endParaRPr lang="en-US" sz="1100" dirty="0"/>
           </a:p>
@@ -28611,7 +29037,7 @@
                 <a:ea typeface="Calibri" pitchFamily="34" charset="-122"/>
                 <a:cs typeface="Calibri" pitchFamily="34" charset="-120"/>
               </a:rPr>
-              <a:t>A KAN-LSTM HYBRID — BOUNDED CHECK</a:t>
+              <a:t>A KAN-LSTM HYBRID — THE ONE CHECK STILL BOUNDED</a:t>
             </a:r>
             <a:endParaRPr lang="en-US" sz="900" dirty="0"/>
           </a:p>
@@ -31579,7 +32005,7 @@
                 <a:ea typeface="Calibri" pitchFamily="34" charset="-122"/>
                 <a:cs typeface="Calibri" pitchFamily="34" charset="-120"/>
               </a:rPr>
-              <a:t>ARIMA beats every ML regressor at every horizon, DM-backed. The two that win are the networks — the GRU and the LSTM, each only at one day ahead, reported as a range over ten seeds. The LSTM is ahead of the GRU at every horizon.</a:t>
+              <a:t>ARIMA beats every ML regressor at every horizon, DM-backed. The three that win are the networks — GRU, LSTM and transformer — each clearly only at one day ahead, reported as a range over ten seeds. Both of the two added on review beat the GRU originally chosen.</a:t>
             </a:r>
             <a:endParaRPr lang="en-US" sz="1050" dirty="0"/>
           </a:p>
@@ -31988,7 +32414,7 @@
                 <a:ea typeface="Calibri" pitchFamily="34" charset="-122"/>
                 <a:cs typeface="Calibri" pitchFamily="34" charset="-120"/>
               </a:rPr>
-              <a:t>Trying several methods rather than defaulting to ARIMA is what surfaced the one-day-ahead network win — and what makes the negative result at two and three days credible rather than assumed. Dr Tian's review added a fourth architecture that beat the one originally chosen.</a:t>
+              <a:t>Trying several methods rather than defaulting to ARIMA is what surfaced the one-day-ahead network win — and what makes the negative result at two and three days credible. Two rounds of supervisor review then added two more architectures, and both beat the one originally chosen.</a:t>
             </a:r>
             <a:endParaRPr lang="en-US" sz="1300" dirty="0"/>
           </a:p>
@@ -32882,7 +33308,7 @@
                 <a:ea typeface="Calibri" pitchFamily="34" charset="-122"/>
                 <a:cs typeface="Calibri" pitchFamily="34" charset="-120"/>
               </a:rPr>
-              <a:t>Finish the LSTM</a:t>
+              <a:t>Finish the LSTM and the transformer</a:t>
             </a:r>
             <a:endParaRPr lang="en-US" sz="1250" dirty="0"/>
           </a:p>
@@ -32924,7 +33350,7 @@
                 <a:ea typeface="Calibri" pitchFamily="34" charset="-122"/>
                 <a:cs typeface="Calibri" pitchFamily="34" charset="-120"/>
               </a:rPr>
-              <a:t>Fit it with the weather channels and carry it through the threshold sweep — the two steps not taken for it. The honest expectation is that this refines the central finding rather than overturning it.</a:t>
+              <a:t>Fit each with the weather channels and carry each through the threshold sweep — the two steps taken for neither. The honest expectation is that this refines the central finding rather than overturning it.</a:t>
             </a:r>
             <a:endParaRPr lang="en-US" sz="1050" dirty="0"/>
           </a:p>
@@ -33035,7 +33461,7 @@
                 <a:ea typeface="Calibri" pitchFamily="34" charset="-122"/>
                 <a:cs typeface="Calibri" pitchFamily="34" charset="-120"/>
               </a:rPr>
-              <a:t>Evaluate the two bounded checks in full</a:t>
+              <a:t>Evaluate the KAN-LSTM hybrid in full</a:t>
             </a:r>
             <a:endParaRPr lang="en-US" sz="1250" dirty="0"/>
           </a:p>
@@ -33077,7 +33503,7 @@
                 <a:ea typeface="Calibri" pitchFamily="34" charset="-122"/>
                 <a:cs typeface="Calibri" pitchFamily="34" charset="-120"/>
               </a:rPr>
-              <a:t>Ten seeds and rolling origins for the transformer and the KAN-LSTM hybrid. Both were more competitive than the small-data argument predicted; one validation split cannot settle whether that is real.</a:t>
+              <a:t>Ten seeds and rolling origins for the one architecture still on a bounded check — the same promotion the transformer was just given, after its own bounded check proved to be understating it.</a:t>
             </a:r>
             <a:endParaRPr lang="en-US" sz="1050" dirty="0"/>
           </a:p>
@@ -41348,7 +41774,7 @@
                 <a:ea typeface="Calibri" pitchFamily="34" charset="-122"/>
                 <a:cs typeface="Calibri" pitchFamily="34" charset="-120"/>
               </a:rPr>
-              <a:t>Each ruled out a priori for a stated reason — then the two closest were fitted anyway.</a:t>
+              <a:t>Each ruled out a priori for a stated reason — then the two closest were fitted in full, and both beat the GRU.</a:t>
             </a:r>
             <a:endParaRPr lang="en-US" sz="1150" dirty="0"/>
           </a:p>
@@ -41797,7 +42223,7 @@
                 <a:ea typeface="Calibri" pitchFamily="34" charset="-122"/>
                 <a:cs typeface="Calibri" pitchFamily="34" charset="-120"/>
               </a:rPr>
-              <a:t>Large parameter counts, tuned for datasets orders of magnitude bigger than ~3,000 observations (Lim et al., 2021) — later fitted as a bounded check</a:t>
+              <a:t>Large parameter counts, tuned for datasets orders of magnitude bigger than ~3,000 observations (Lim et al., 2021) — fitted in full after Dr Tian challenged that premise, and it beats the GRU</a:t>
             </a:r>
             <a:endParaRPr lang="en-US" sz="1150" dirty="0"/>
           </a:p>
@@ -42083,7 +42509,7 @@
                 <a:ea typeface="Calibri" pitchFamily="34" charset="-122"/>
                 <a:cs typeface="Calibri" pitchFamily="34" charset="-120"/>
               </a:rPr>
-              <a:t>Fixes that with 3 gates and a memory cell — more parameters than this dataset needs (Hochreiter &amp; Schmidhuber, 1997) — fitted in full on Dr Tian's advice, and it wins</a:t>
+              <a:t>Fixes that with 3 gates and a memory cell — more parameters than this dataset needs (Hochreiter &amp; Schmidhuber, 1997) — fitted in full on Dr Tian's advice, and it wins too</a:t>
             </a:r>
             <a:endParaRPr lang="en-US" sz="1150" dirty="0"/>
           </a:p>
@@ -42226,7 +42652,7 @@
                 <a:ea typeface="Calibri" pitchFamily="34" charset="-122"/>
                 <a:cs typeface="Calibri" pitchFamily="34" charset="-120"/>
               </a:rPr>
-              <a:t>2 gates, no memory cell, same gradient-flow property, smaller parameter count (Cho et al., 2014). Chapter 4 tests that last reason directly — and does not support it.</a:t>
+              <a:t>2 gates, no memory cell, same gradient-flow property, smaller parameter count (Cho et al., 2014). Chapter 4 tests both size arguments directly — and supports neither.</a:t>
             </a:r>
             <a:endParaRPr lang="en-US" sz="1100" dirty="0"/>
           </a:p>
